--- a/public/lessons/year-6-maths/summer/week-23/convert-mass-and-capacity/teaching-powerpoint-v1.pptx
+++ b/public/lessons/year-6-maths/summer/week-23/convert-mass-and-capacity/teaching-powerpoint-v1.pptx
@@ -2,24 +2,24 @@
 <file path=ppt/presentation.xml><?xml version="1.0" encoding="utf-8"?>
 <p:presentation xmlns:p="http://schemas.openxmlformats.org/presentationml/2006/main">
   <p:sldMasterIdLst>
-    <p:sldMasterId xmlns:r="http://schemas.openxmlformats.org/officeDocument/2006/relationships" id="2147483648" r:id="R3d28b9f545824567"/>
+    <p:sldMasterId xmlns:r="http://schemas.openxmlformats.org/officeDocument/2006/relationships" id="2147483648" r:id="R5cf56800fae248dc"/>
   </p:sldMasterIdLst>
   <p:notesMasterIdLst>
-    <p:notesMasterId xmlns:r="http://schemas.openxmlformats.org/officeDocument/2006/relationships" r:id="Rbe044c441fe146a1"/>
+    <p:notesMasterId xmlns:r="http://schemas.openxmlformats.org/officeDocument/2006/relationships" r:id="R23a108a298244860"/>
   </p:notesMasterIdLst>
   <p:sldIdLst>
-    <p:sldId xmlns:r="http://schemas.openxmlformats.org/officeDocument/2006/relationships" id="256" r:id="R488c262f268f480b"/>
-    <p:sldId xmlns:r="http://schemas.openxmlformats.org/officeDocument/2006/relationships" id="257" r:id="Rabe23377057344be"/>
-    <p:sldId xmlns:r="http://schemas.openxmlformats.org/officeDocument/2006/relationships" id="258" r:id="Rc19386375ccf4b02"/>
-    <p:sldId xmlns:r="http://schemas.openxmlformats.org/officeDocument/2006/relationships" id="259" r:id="R54d35ea7b184487e"/>
-    <p:sldId xmlns:r="http://schemas.openxmlformats.org/officeDocument/2006/relationships" id="260" r:id="R47944d6c0b8a4fae"/>
-    <p:sldId xmlns:r="http://schemas.openxmlformats.org/officeDocument/2006/relationships" id="261" r:id="R7f82b73e84ff40c1"/>
-    <p:sldId xmlns:r="http://schemas.openxmlformats.org/officeDocument/2006/relationships" id="262" r:id="Rbfcc957c625840a0"/>
-    <p:sldId xmlns:r="http://schemas.openxmlformats.org/officeDocument/2006/relationships" id="263" r:id="R079c9ba0ca2b430f"/>
-    <p:sldId xmlns:r="http://schemas.openxmlformats.org/officeDocument/2006/relationships" id="264" r:id="Rd4bf7ba5667a4bf8"/>
-    <p:sldId xmlns:r="http://schemas.openxmlformats.org/officeDocument/2006/relationships" id="265" r:id="Rcb62ee0d0b564a42"/>
-    <p:sldId xmlns:r="http://schemas.openxmlformats.org/officeDocument/2006/relationships" id="266" r:id="R16ec88ebe8d941a6"/>
-    <p:sldId xmlns:r="http://schemas.openxmlformats.org/officeDocument/2006/relationships" id="267" r:id="R4162f62df44b4169"/>
+    <p:sldId xmlns:r="http://schemas.openxmlformats.org/officeDocument/2006/relationships" id="256" r:id="R5de51e11ecf247f8"/>
+    <p:sldId xmlns:r="http://schemas.openxmlformats.org/officeDocument/2006/relationships" id="257" r:id="Rbc6f703f52f649f9"/>
+    <p:sldId xmlns:r="http://schemas.openxmlformats.org/officeDocument/2006/relationships" id="258" r:id="Rf4dbae7df2c14b74"/>
+    <p:sldId xmlns:r="http://schemas.openxmlformats.org/officeDocument/2006/relationships" id="259" r:id="Rdc01552f478f4a46"/>
+    <p:sldId xmlns:r="http://schemas.openxmlformats.org/officeDocument/2006/relationships" id="260" r:id="Re0639feb70614404"/>
+    <p:sldId xmlns:r="http://schemas.openxmlformats.org/officeDocument/2006/relationships" id="261" r:id="Rb77c54c370434d79"/>
+    <p:sldId xmlns:r="http://schemas.openxmlformats.org/officeDocument/2006/relationships" id="262" r:id="Ra9272d1b439f4397"/>
+    <p:sldId xmlns:r="http://schemas.openxmlformats.org/officeDocument/2006/relationships" id="263" r:id="R330ba41fa63d45e9"/>
+    <p:sldId xmlns:r="http://schemas.openxmlformats.org/officeDocument/2006/relationships" id="264" r:id="Ref127024d39247f4"/>
+    <p:sldId xmlns:r="http://schemas.openxmlformats.org/officeDocument/2006/relationships" id="265" r:id="Red3afd2194eb47f6"/>
+    <p:sldId xmlns:r="http://schemas.openxmlformats.org/officeDocument/2006/relationships" id="266" r:id="R1d53adeb0fa34a4e"/>
+    <p:sldId xmlns:r="http://schemas.openxmlformats.org/officeDocument/2006/relationships" id="267" r:id="Rc871d444813444b5"/>
   </p:sldIdLst>
   <p:sldSz cx="12192000" cy="6858000"/>
   <p:notesSz cx="6858000" cy="9144000"/>
@@ -873,7 +873,7 @@
           <a:lstStyle xmlns:a="http://schemas.openxmlformats.org/drawingml/2006/main"/>
           <a:p xmlns:a="http://schemas.openxmlformats.org/drawingml/2006/main">
             <a:r>
-              <a:t>I do. Reveal the question, setup and each calculation stage one click at a time. Pupils watch before copying. Model answer: 2,650 g and 3.75 litres.</a:t>
+              <a:t>I do. Reveal the question, then reveal each mathematical change one click at a time. Point to the numbers and operation that changed before moving to the next line. Final answer: 2,650 g and 3.75 litres.</a:t>
             </a:r>
           </a:p>
         </p:txBody>
@@ -1291,7 +1291,7 @@
   </p:cSld>
   <p:clrMap bg1="lt1" tx1="dk1" bg2="lt2" tx2="dk2" accent1="accent1" accent2="accent2" accent3="accent3" accent4="accent4" accent5="accent5" accent6="accent6" hlink="hlink" folHlink="folHlink"/>
   <p:sldLayoutIdLst>
-    <p:sldLayoutId xmlns:r="http://schemas.openxmlformats.org/officeDocument/2006/relationships" id="2147483649" r:id="R1df7becb2c304350"/>
+    <p:sldLayoutId xmlns:r="http://schemas.openxmlformats.org/officeDocument/2006/relationships" id="2147483649" r:id="R0db2744efd054d6a"/>
   </p:sldLayoutIdLst>
   <p:txStyles>
     <p:titleStyle>
@@ -1842,7 +1842,7 @@
           <p:cNvPr id="12" name="">
             <a:extLst xmlns:a="http://schemas.openxmlformats.org/drawingml/2006/main">
               <a:ext uri="{FF2B5EF4-FFF2-40B4-BE49-F238E27FC236}">
-                <a16:creationId xmlns:a16="http://schemas.microsoft.com/office/drawing/2014/main" id="{FAA6403D-F596-4846-AAE5-A9BA45494812}"/>
+                <a16:creationId xmlns:a16="http://schemas.microsoft.com/office/drawing/2014/main" id="{652FCE9C-B5E4-4896-A1AF-0005177214F8}"/>
               </a:ext>
             </a:extLst>
           </p:cNvPr>
@@ -1874,7 +1874,7 @@
           <p:cNvPr id="2" name="">
             <a:extLst xmlns:a="http://schemas.openxmlformats.org/drawingml/2006/main">
               <a:ext uri="{FF2B5EF4-FFF2-40B4-BE49-F238E27FC236}">
-                <a16:creationId xmlns:a16="http://schemas.microsoft.com/office/drawing/2014/main" id="{BDACD93A-55C5-4CC4-AEB6-5470ACC18F77}"/>
+                <a16:creationId xmlns:a16="http://schemas.microsoft.com/office/drawing/2014/main" id="{A2D5516D-5203-4456-9262-051E5B87A0ED}"/>
               </a:ext>
             </a:extLst>
           </p:cNvPr>
@@ -1931,7 +1931,7 @@
           <p:cNvPr id="3" name="">
             <a:extLst xmlns:a="http://schemas.openxmlformats.org/drawingml/2006/main">
               <a:ext uri="{FF2B5EF4-FFF2-40B4-BE49-F238E27FC236}">
-                <a16:creationId xmlns:a16="http://schemas.microsoft.com/office/drawing/2014/main" id="{90DE0D0F-BF98-49A3-BA8E-5DC6AE52544F}"/>
+                <a16:creationId xmlns:a16="http://schemas.microsoft.com/office/drawing/2014/main" id="{7F51A053-91C4-46B4-A9B5-D1F230809A21}"/>
               </a:ext>
             </a:extLst>
           </p:cNvPr>
@@ -1965,7 +1965,7 @@
           <p:cNvPr id="4" name="">
             <a:extLst xmlns:a="http://schemas.openxmlformats.org/drawingml/2006/main">
               <a:ext uri="{FF2B5EF4-FFF2-40B4-BE49-F238E27FC236}">
-                <a16:creationId xmlns:a16="http://schemas.microsoft.com/office/drawing/2014/main" id="{7B0F1F39-3A6B-4C29-886A-ECE899AB39E2}"/>
+                <a16:creationId xmlns:a16="http://schemas.microsoft.com/office/drawing/2014/main" id="{56A09A36-95F6-4D97-871C-788C05914F02}"/>
               </a:ext>
             </a:extLst>
           </p:cNvPr>
@@ -2022,7 +2022,7 @@
           <p:cNvPr id="5" name="">
             <a:extLst xmlns:a="http://schemas.openxmlformats.org/drawingml/2006/main">
               <a:ext uri="{FF2B5EF4-FFF2-40B4-BE49-F238E27FC236}">
-                <a16:creationId xmlns:a16="http://schemas.microsoft.com/office/drawing/2014/main" id="{9FEEAAA9-E957-479C-B44A-0EBE8A9113EB}"/>
+                <a16:creationId xmlns:a16="http://schemas.microsoft.com/office/drawing/2014/main" id="{30721A7C-ECA3-4B04-BBA8-7DE6D50176C5}"/>
               </a:ext>
             </a:extLst>
           </p:cNvPr>
@@ -2079,7 +2079,7 @@
           <p:cNvPr id="6" name="">
             <a:extLst xmlns:a="http://schemas.openxmlformats.org/drawingml/2006/main">
               <a:ext uri="{FF2B5EF4-FFF2-40B4-BE49-F238E27FC236}">
-                <a16:creationId xmlns:a16="http://schemas.microsoft.com/office/drawing/2014/main" id="{4FBC4A42-E556-4989-AF37-B6C032C8F315}"/>
+                <a16:creationId xmlns:a16="http://schemas.microsoft.com/office/drawing/2014/main" id="{34D2EAA8-FE47-4C81-81BF-136E41E44827}"/>
               </a:ext>
             </a:extLst>
           </p:cNvPr>
@@ -2113,7 +2113,7 @@
           <p:cNvPr id="7" name="">
             <a:extLst xmlns:a="http://schemas.openxmlformats.org/drawingml/2006/main">
               <a:ext uri="{FF2B5EF4-FFF2-40B4-BE49-F238E27FC236}">
-                <a16:creationId xmlns:a16="http://schemas.microsoft.com/office/drawing/2014/main" id="{6EEA9785-1B28-4EB9-A05F-4A2139A41CD2}"/>
+                <a16:creationId xmlns:a16="http://schemas.microsoft.com/office/drawing/2014/main" id="{707A95DD-F310-4AD7-8249-5F5251C26083}"/>
               </a:ext>
             </a:extLst>
           </p:cNvPr>
@@ -2170,7 +2170,7 @@
           <p:cNvPr id="8" name="">
             <a:extLst xmlns:a="http://schemas.openxmlformats.org/drawingml/2006/main">
               <a:ext uri="{FF2B5EF4-FFF2-40B4-BE49-F238E27FC236}">
-                <a16:creationId xmlns:a16="http://schemas.microsoft.com/office/drawing/2014/main" id="{1F0F4661-598F-458A-AD65-FB99A8DA94E4}"/>
+                <a16:creationId xmlns:a16="http://schemas.microsoft.com/office/drawing/2014/main" id="{562BCAD5-D694-4E3B-AEE0-4A0250375627}"/>
               </a:ext>
             </a:extLst>
           </p:cNvPr>
@@ -2227,7 +2227,7 @@
           <p:cNvPr id="9" name="">
             <a:extLst xmlns:a="http://schemas.openxmlformats.org/drawingml/2006/main">
               <a:ext uri="{FF2B5EF4-FFF2-40B4-BE49-F238E27FC236}">
-                <a16:creationId xmlns:a16="http://schemas.microsoft.com/office/drawing/2014/main" id="{CFF9BBDF-3E86-4C0B-938E-61B4A5EE8C15}"/>
+                <a16:creationId xmlns:a16="http://schemas.microsoft.com/office/drawing/2014/main" id="{CF1F227A-5F03-445F-830D-4025BCCFD962}"/>
               </a:ext>
             </a:extLst>
           </p:cNvPr>
@@ -2284,7 +2284,7 @@
           <p:cNvPr id="10" name="">
             <a:extLst xmlns:a="http://schemas.openxmlformats.org/drawingml/2006/main">
               <a:ext uri="{FF2B5EF4-FFF2-40B4-BE49-F238E27FC236}">
-                <a16:creationId xmlns:a16="http://schemas.microsoft.com/office/drawing/2014/main" id="{3498320F-D2E3-40F6-9D33-CDAFC002EDE9}"/>
+                <a16:creationId xmlns:a16="http://schemas.microsoft.com/office/drawing/2014/main" id="{5FF9C8C9-C638-4E68-955E-43D6042F4AC0}"/>
               </a:ext>
             </a:extLst>
           </p:cNvPr>
@@ -2341,7 +2341,7 @@
           <p:cNvPr id="11" name="">
             <a:extLst xmlns:a="http://schemas.openxmlformats.org/drawingml/2006/main">
               <a:ext uri="{FF2B5EF4-FFF2-40B4-BE49-F238E27FC236}">
-                <a16:creationId xmlns:a16="http://schemas.microsoft.com/office/drawing/2014/main" id="{6D2A8B55-81F9-406E-B61F-3A65FEAB820D}"/>
+                <a16:creationId xmlns:a16="http://schemas.microsoft.com/office/drawing/2014/main" id="{B3EC95AC-F000-4D3D-AAAA-1675C6ECF08F}"/>
               </a:ext>
             </a:extLst>
           </p:cNvPr>
@@ -2396,7 +2396,7 @@
     </p:spTree>
     <p:extLst>
       <p:ext uri="{BB962C8B-B14F-4D97-AF65-F5344CB8AC3E}">
-        <p14:creationId xmlns:p14="http://schemas.microsoft.com/office/powerpoint/2010/main" val="1807885484"/>
+        <p14:creationId xmlns:p14="http://schemas.microsoft.com/office/powerpoint/2010/main" val="1728288242"/>
       </p:ext>
     </p:extLst>
   </p:cSld>
@@ -2427,7 +2427,7 @@
           <p:cNvPr id="14" name="">
             <a:extLst xmlns:a="http://schemas.openxmlformats.org/drawingml/2006/main">
               <a:ext uri="{FF2B5EF4-FFF2-40B4-BE49-F238E27FC236}">
-                <a16:creationId xmlns:a16="http://schemas.microsoft.com/office/drawing/2014/main" id="{5DB78133-D365-4D6C-90BA-B188607AFE70}"/>
+                <a16:creationId xmlns:a16="http://schemas.microsoft.com/office/drawing/2014/main" id="{88E8C65F-E9A3-4136-9904-3821B0FC7000}"/>
               </a:ext>
             </a:extLst>
           </p:cNvPr>
@@ -2459,7 +2459,7 @@
           <p:cNvPr id="2" name="">
             <a:extLst xmlns:a="http://schemas.openxmlformats.org/drawingml/2006/main">
               <a:ext uri="{FF2B5EF4-FFF2-40B4-BE49-F238E27FC236}">
-                <a16:creationId xmlns:a16="http://schemas.microsoft.com/office/drawing/2014/main" id="{E20EDACE-AC26-463A-95C4-7A57D13DB661}"/>
+                <a16:creationId xmlns:a16="http://schemas.microsoft.com/office/drawing/2014/main" id="{FFBBA694-2C35-448B-BAB9-9A754B289FC2}"/>
               </a:ext>
             </a:extLst>
           </p:cNvPr>
@@ -2516,7 +2516,7 @@
           <p:cNvPr id="3" name="">
             <a:extLst xmlns:a="http://schemas.openxmlformats.org/drawingml/2006/main">
               <a:ext uri="{FF2B5EF4-FFF2-40B4-BE49-F238E27FC236}">
-                <a16:creationId xmlns:a16="http://schemas.microsoft.com/office/drawing/2014/main" id="{DE69B100-45A3-494E-B5B3-16D031F126AF}"/>
+                <a16:creationId xmlns:a16="http://schemas.microsoft.com/office/drawing/2014/main" id="{D959978E-BB03-4E9B-9D06-49CF9462BBB5}"/>
               </a:ext>
             </a:extLst>
           </p:cNvPr>
@@ -2548,7 +2548,7 @@
           <p:cNvPr id="4" name="">
             <a:extLst xmlns:a="http://schemas.openxmlformats.org/drawingml/2006/main">
               <a:ext uri="{FF2B5EF4-FFF2-40B4-BE49-F238E27FC236}">
-                <a16:creationId xmlns:a16="http://schemas.microsoft.com/office/drawing/2014/main" id="{BA35896E-6FF2-46F5-964D-954DE61BAE33}"/>
+                <a16:creationId xmlns:a16="http://schemas.microsoft.com/office/drawing/2014/main" id="{9DB11DB2-B45A-4B99-BF7A-87A30CE10608}"/>
               </a:ext>
             </a:extLst>
           </p:cNvPr>
@@ -2605,7 +2605,7 @@
           <p:cNvPr id="5" name="">
             <a:extLst xmlns:a="http://schemas.openxmlformats.org/drawingml/2006/main">
               <a:ext uri="{FF2B5EF4-FFF2-40B4-BE49-F238E27FC236}">
-                <a16:creationId xmlns:a16="http://schemas.microsoft.com/office/drawing/2014/main" id="{CFAE61D2-DE46-40AB-B478-1A124C32BE73}"/>
+                <a16:creationId xmlns:a16="http://schemas.microsoft.com/office/drawing/2014/main" id="{7524FE8D-9FCC-4550-BE9C-4D648037656A}"/>
               </a:ext>
             </a:extLst>
           </p:cNvPr>
@@ -2662,7 +2662,7 @@
           <p:cNvPr id="6" name="">
             <a:extLst xmlns:a="http://schemas.openxmlformats.org/drawingml/2006/main">
               <a:ext uri="{FF2B5EF4-FFF2-40B4-BE49-F238E27FC236}">
-                <a16:creationId xmlns:a16="http://schemas.microsoft.com/office/drawing/2014/main" id="{748D8C05-60F4-4139-B2E2-399CFE9B7709}"/>
+                <a16:creationId xmlns:a16="http://schemas.microsoft.com/office/drawing/2014/main" id="{13DDEB3F-8034-4565-8D55-C1E482783A09}"/>
               </a:ext>
             </a:extLst>
           </p:cNvPr>
@@ -2719,7 +2719,7 @@
           <p:cNvPr id="7" name="">
             <a:extLst xmlns:a="http://schemas.openxmlformats.org/drawingml/2006/main">
               <a:ext uri="{FF2B5EF4-FFF2-40B4-BE49-F238E27FC236}">
-                <a16:creationId xmlns:a16="http://schemas.microsoft.com/office/drawing/2014/main" id="{0CEF5295-637A-470A-9F2A-242B4D5BBF01}"/>
+                <a16:creationId xmlns:a16="http://schemas.microsoft.com/office/drawing/2014/main" id="{93200DD7-55EB-428B-A083-4EC2D700D347}"/>
               </a:ext>
             </a:extLst>
           </p:cNvPr>
@@ -2751,7 +2751,7 @@
           <p:cNvPr id="8" name="">
             <a:extLst xmlns:a="http://schemas.openxmlformats.org/drawingml/2006/main">
               <a:ext uri="{FF2B5EF4-FFF2-40B4-BE49-F238E27FC236}">
-                <a16:creationId xmlns:a16="http://schemas.microsoft.com/office/drawing/2014/main" id="{D030C48B-D1B2-4FED-9C9C-0A642989E153}"/>
+                <a16:creationId xmlns:a16="http://schemas.microsoft.com/office/drawing/2014/main" id="{381FCCB5-0E11-4373-BC8C-833D347751D2}"/>
               </a:ext>
             </a:extLst>
           </p:cNvPr>
@@ -2808,7 +2808,7 @@
           <p:cNvPr id="9" name="">
             <a:extLst xmlns:a="http://schemas.openxmlformats.org/drawingml/2006/main">
               <a:ext uri="{FF2B5EF4-FFF2-40B4-BE49-F238E27FC236}">
-                <a16:creationId xmlns:a16="http://schemas.microsoft.com/office/drawing/2014/main" id="{383CC530-1899-421C-911A-539173EB7336}"/>
+                <a16:creationId xmlns:a16="http://schemas.microsoft.com/office/drawing/2014/main" id="{D23B7652-6D80-46B6-9729-D90D74F65573}"/>
               </a:ext>
             </a:extLst>
           </p:cNvPr>
@@ -2865,7 +2865,7 @@
           <p:cNvPr id="10" name="">
             <a:extLst xmlns:a="http://schemas.openxmlformats.org/drawingml/2006/main">
               <a:ext uri="{FF2B5EF4-FFF2-40B4-BE49-F238E27FC236}">
-                <a16:creationId xmlns:a16="http://schemas.microsoft.com/office/drawing/2014/main" id="{2D3FBB3F-0BD9-4E4D-B68D-A75E3A5D9BED}"/>
+                <a16:creationId xmlns:a16="http://schemas.microsoft.com/office/drawing/2014/main" id="{BC5E704B-C58D-4141-97EE-D660C1BA7395}"/>
               </a:ext>
             </a:extLst>
           </p:cNvPr>
@@ -2922,7 +2922,7 @@
           <p:cNvPr id="11" name="">
             <a:extLst xmlns:a="http://schemas.openxmlformats.org/drawingml/2006/main">
               <a:ext uri="{FF2B5EF4-FFF2-40B4-BE49-F238E27FC236}">
-                <a16:creationId xmlns:a16="http://schemas.microsoft.com/office/drawing/2014/main" id="{376EBA88-EB0A-44DA-9B8D-E3B4C819840B}"/>
+                <a16:creationId xmlns:a16="http://schemas.microsoft.com/office/drawing/2014/main" id="{2FB8C00A-660D-4BF4-9354-5B80E208469B}"/>
               </a:ext>
             </a:extLst>
           </p:cNvPr>
@@ -2979,7 +2979,7 @@
           <p:cNvPr id="12" name="">
             <a:extLst xmlns:a="http://schemas.openxmlformats.org/drawingml/2006/main">
               <a:ext uri="{FF2B5EF4-FFF2-40B4-BE49-F238E27FC236}">
-                <a16:creationId xmlns:a16="http://schemas.microsoft.com/office/drawing/2014/main" id="{1B79732C-A1B8-4A4B-AA71-F9CB7B12610F}"/>
+                <a16:creationId xmlns:a16="http://schemas.microsoft.com/office/drawing/2014/main" id="{089FCEDD-10E2-4FB6-9FC8-37A97FE13119}"/>
               </a:ext>
             </a:extLst>
           </p:cNvPr>
@@ -3036,7 +3036,7 @@
           <p:cNvPr id="13" name="">
             <a:extLst xmlns:a="http://schemas.openxmlformats.org/drawingml/2006/main">
               <a:ext uri="{FF2B5EF4-FFF2-40B4-BE49-F238E27FC236}">
-                <a16:creationId xmlns:a16="http://schemas.microsoft.com/office/drawing/2014/main" id="{E72AD588-2F52-4852-AAB2-893CE6189519}"/>
+                <a16:creationId xmlns:a16="http://schemas.microsoft.com/office/drawing/2014/main" id="{3704D452-55AB-47DF-9E27-56180CB7D6D3}"/>
               </a:ext>
             </a:extLst>
           </p:cNvPr>
@@ -3091,7 +3091,7 @@
     </p:spTree>
     <p:extLst>
       <p:ext uri="{BB962C8B-B14F-4D97-AF65-F5344CB8AC3E}">
-        <p14:creationId xmlns:p14="http://schemas.microsoft.com/office/powerpoint/2010/main" val="1716168204"/>
+        <p14:creationId xmlns:p14="http://schemas.microsoft.com/office/powerpoint/2010/main" val="852405356"/>
       </p:ext>
     </p:extLst>
   </p:cSld>
@@ -3292,7 +3292,7 @@
           <p:cNvPr id="19" name="">
             <a:extLst xmlns:a="http://schemas.openxmlformats.org/drawingml/2006/main">
               <a:ext uri="{FF2B5EF4-FFF2-40B4-BE49-F238E27FC236}">
-                <a16:creationId xmlns:a16="http://schemas.microsoft.com/office/drawing/2014/main" id="{DCFDB506-CA5C-47D1-8018-0DE8CAE0C745}"/>
+                <a16:creationId xmlns:a16="http://schemas.microsoft.com/office/drawing/2014/main" id="{B8A550E9-8D73-461B-8DFE-BF05A4122CAA}"/>
               </a:ext>
             </a:extLst>
           </p:cNvPr>
@@ -3324,7 +3324,7 @@
           <p:cNvPr id="2" name="">
             <a:extLst xmlns:a="http://schemas.openxmlformats.org/drawingml/2006/main">
               <a:ext uri="{FF2B5EF4-FFF2-40B4-BE49-F238E27FC236}">
-                <a16:creationId xmlns:a16="http://schemas.microsoft.com/office/drawing/2014/main" id="{590C6570-5A3B-4CD8-9443-AABE6FC9452F}"/>
+                <a16:creationId xmlns:a16="http://schemas.microsoft.com/office/drawing/2014/main" id="{1FB5127F-E238-412A-86DB-524A6E34A5F5}"/>
               </a:ext>
             </a:extLst>
           </p:cNvPr>
@@ -3381,7 +3381,7 @@
           <p:cNvPr id="3" name="">
             <a:extLst xmlns:a="http://schemas.openxmlformats.org/drawingml/2006/main">
               <a:ext uri="{FF2B5EF4-FFF2-40B4-BE49-F238E27FC236}">
-                <a16:creationId xmlns:a16="http://schemas.microsoft.com/office/drawing/2014/main" id="{7DE65E84-3DBE-4C0C-B8D6-2CB955E2802E}"/>
+                <a16:creationId xmlns:a16="http://schemas.microsoft.com/office/drawing/2014/main" id="{55047D13-F7AB-4AA6-900C-20C0AE66250C}"/>
               </a:ext>
             </a:extLst>
           </p:cNvPr>
@@ -3413,7 +3413,7 @@
           <p:cNvPr id="4" name="">
             <a:extLst xmlns:a="http://schemas.openxmlformats.org/drawingml/2006/main">
               <a:ext uri="{FF2B5EF4-FFF2-40B4-BE49-F238E27FC236}">
-                <a16:creationId xmlns:a16="http://schemas.microsoft.com/office/drawing/2014/main" id="{24590803-4CC0-4038-8FFE-C691045D1FDA}"/>
+                <a16:creationId xmlns:a16="http://schemas.microsoft.com/office/drawing/2014/main" id="{3C88BAF1-027D-459D-8F9B-2CF99D90DBC5}"/>
               </a:ext>
             </a:extLst>
           </p:cNvPr>
@@ -3470,7 +3470,7 @@
           <p:cNvPr id="5" name="">
             <a:extLst xmlns:a="http://schemas.openxmlformats.org/drawingml/2006/main">
               <a:ext uri="{FF2B5EF4-FFF2-40B4-BE49-F238E27FC236}">
-                <a16:creationId xmlns:a16="http://schemas.microsoft.com/office/drawing/2014/main" id="{0EEB4E21-9B85-4C4B-B4F0-F1C4EAAD3ED4}"/>
+                <a16:creationId xmlns:a16="http://schemas.microsoft.com/office/drawing/2014/main" id="{0E522037-EC5A-43A9-89EF-229E2CFAFE0A}"/>
               </a:ext>
             </a:extLst>
           </p:cNvPr>
@@ -3527,7 +3527,7 @@
           <p:cNvPr id="6" name="">
             <a:extLst xmlns:a="http://schemas.openxmlformats.org/drawingml/2006/main">
               <a:ext uri="{FF2B5EF4-FFF2-40B4-BE49-F238E27FC236}">
-                <a16:creationId xmlns:a16="http://schemas.microsoft.com/office/drawing/2014/main" id="{F91E144B-33BB-41D8-BC26-583A99F4EE02}"/>
+                <a16:creationId xmlns:a16="http://schemas.microsoft.com/office/drawing/2014/main" id="{9D9842A9-6003-4F56-A297-0B064BEE1E05}"/>
               </a:ext>
             </a:extLst>
           </p:cNvPr>
@@ -3584,7 +3584,7 @@
           <p:cNvPr id="7" name="">
             <a:extLst xmlns:a="http://schemas.openxmlformats.org/drawingml/2006/main">
               <a:ext uri="{FF2B5EF4-FFF2-40B4-BE49-F238E27FC236}">
-                <a16:creationId xmlns:a16="http://schemas.microsoft.com/office/drawing/2014/main" id="{F914EB39-CDE4-4B4D-97FC-F88DC0FE1ED7}"/>
+                <a16:creationId xmlns:a16="http://schemas.microsoft.com/office/drawing/2014/main" id="{39D994DC-0711-4036-9AE6-7C24C035EC30}"/>
               </a:ext>
             </a:extLst>
           </p:cNvPr>
@@ -3616,7 +3616,7 @@
           <p:cNvPr id="8" name="">
             <a:extLst xmlns:a="http://schemas.openxmlformats.org/drawingml/2006/main">
               <a:ext uri="{FF2B5EF4-FFF2-40B4-BE49-F238E27FC236}">
-                <a16:creationId xmlns:a16="http://schemas.microsoft.com/office/drawing/2014/main" id="{B327724C-09A2-49E7-ABE1-EE74C7F84FC4}"/>
+                <a16:creationId xmlns:a16="http://schemas.microsoft.com/office/drawing/2014/main" id="{0EA021D8-3459-471D-A2F0-89F6AB7A8C20}"/>
               </a:ext>
             </a:extLst>
           </p:cNvPr>
@@ -3673,7 +3673,7 @@
           <p:cNvPr id="9" name="">
             <a:extLst xmlns:a="http://schemas.openxmlformats.org/drawingml/2006/main">
               <a:ext uri="{FF2B5EF4-FFF2-40B4-BE49-F238E27FC236}">
-                <a16:creationId xmlns:a16="http://schemas.microsoft.com/office/drawing/2014/main" id="{11DAB6B4-3871-49EC-9E51-78E752C1A33F}"/>
+                <a16:creationId xmlns:a16="http://schemas.microsoft.com/office/drawing/2014/main" id="{90D081BD-90CB-42D9-B67E-C20C579E1A4C}"/>
               </a:ext>
             </a:extLst>
           </p:cNvPr>
@@ -3730,7 +3730,7 @@
           <p:cNvPr id="10" name="">
             <a:extLst xmlns:a="http://schemas.openxmlformats.org/drawingml/2006/main">
               <a:ext uri="{FF2B5EF4-FFF2-40B4-BE49-F238E27FC236}">
-                <a16:creationId xmlns:a16="http://schemas.microsoft.com/office/drawing/2014/main" id="{A6257A55-50C7-497D-AC84-397A1EE00784}"/>
+                <a16:creationId xmlns:a16="http://schemas.microsoft.com/office/drawing/2014/main" id="{BBBE814D-6A8C-4C4D-8A27-3F1068E5C6D1}"/>
               </a:ext>
             </a:extLst>
           </p:cNvPr>
@@ -3787,7 +3787,7 @@
           <p:cNvPr id="11" name="">
             <a:extLst xmlns:a="http://schemas.openxmlformats.org/drawingml/2006/main">
               <a:ext uri="{FF2B5EF4-FFF2-40B4-BE49-F238E27FC236}">
-                <a16:creationId xmlns:a16="http://schemas.microsoft.com/office/drawing/2014/main" id="{24D5EE10-1A7A-4470-A496-542F19F9CFFB}"/>
+                <a16:creationId xmlns:a16="http://schemas.microsoft.com/office/drawing/2014/main" id="{73F36315-DACA-44AD-BFCB-CF20287FCE03}"/>
               </a:ext>
             </a:extLst>
           </p:cNvPr>
@@ -3821,7 +3821,7 @@
           <p:cNvPr id="12" name="">
             <a:extLst xmlns:a="http://schemas.openxmlformats.org/drawingml/2006/main">
               <a:ext uri="{FF2B5EF4-FFF2-40B4-BE49-F238E27FC236}">
-                <a16:creationId xmlns:a16="http://schemas.microsoft.com/office/drawing/2014/main" id="{D0CA57EA-06FB-4BDA-B283-DF8FC8C8C875}"/>
+                <a16:creationId xmlns:a16="http://schemas.microsoft.com/office/drawing/2014/main" id="{9E4EE959-BB4A-48DA-AB66-D16287245793}"/>
               </a:ext>
             </a:extLst>
           </p:cNvPr>
@@ -3878,7 +3878,7 @@
           <p:cNvPr id="13" name="">
             <a:extLst xmlns:a="http://schemas.openxmlformats.org/drawingml/2006/main">
               <a:ext uri="{FF2B5EF4-FFF2-40B4-BE49-F238E27FC236}">
-                <a16:creationId xmlns:a16="http://schemas.microsoft.com/office/drawing/2014/main" id="{CA28A32D-BF69-423D-B221-9C82B6C0267C}"/>
+                <a16:creationId xmlns:a16="http://schemas.microsoft.com/office/drawing/2014/main" id="{929C600C-12CF-484D-93C2-2C61001D6BA6}"/>
               </a:ext>
             </a:extLst>
           </p:cNvPr>
@@ -3935,7 +3935,7 @@
           <p:cNvPr id="14" name="">
             <a:extLst xmlns:a="http://schemas.openxmlformats.org/drawingml/2006/main">
               <a:ext uri="{FF2B5EF4-FFF2-40B4-BE49-F238E27FC236}">
-                <a16:creationId xmlns:a16="http://schemas.microsoft.com/office/drawing/2014/main" id="{37804885-EF24-44E4-8B91-0F0AE94F6569}"/>
+                <a16:creationId xmlns:a16="http://schemas.microsoft.com/office/drawing/2014/main" id="{88B50E20-93A5-49D3-B1C4-3A7ED7C6C6BC}"/>
               </a:ext>
             </a:extLst>
           </p:cNvPr>
@@ -3992,7 +3992,7 @@
           <p:cNvPr id="15" name="">
             <a:extLst xmlns:a="http://schemas.openxmlformats.org/drawingml/2006/main">
               <a:ext uri="{FF2B5EF4-FFF2-40B4-BE49-F238E27FC236}">
-                <a16:creationId xmlns:a16="http://schemas.microsoft.com/office/drawing/2014/main" id="{86ADE324-19C0-4B39-B2F8-BC1F7964F6A2}"/>
+                <a16:creationId xmlns:a16="http://schemas.microsoft.com/office/drawing/2014/main" id="{96626226-1CA4-47C7-B3CC-8190CCF22040}"/>
               </a:ext>
             </a:extLst>
           </p:cNvPr>
@@ -4026,7 +4026,7 @@
           <p:cNvPr id="16" name="">
             <a:extLst xmlns:a="http://schemas.openxmlformats.org/drawingml/2006/main">
               <a:ext uri="{FF2B5EF4-FFF2-40B4-BE49-F238E27FC236}">
-                <a16:creationId xmlns:a16="http://schemas.microsoft.com/office/drawing/2014/main" id="{E6F20789-54AC-4541-A442-39763E2FB038}"/>
+                <a16:creationId xmlns:a16="http://schemas.microsoft.com/office/drawing/2014/main" id="{8E88BE22-8891-4604-B8AB-FB38521FBB8C}"/>
               </a:ext>
             </a:extLst>
           </p:cNvPr>
@@ -4083,7 +4083,7 @@
           <p:cNvPr id="17" name="">
             <a:extLst xmlns:a="http://schemas.openxmlformats.org/drawingml/2006/main">
               <a:ext uri="{FF2B5EF4-FFF2-40B4-BE49-F238E27FC236}">
-                <a16:creationId xmlns:a16="http://schemas.microsoft.com/office/drawing/2014/main" id="{FD39819C-D7AA-4A39-9046-B12D838BE79C}"/>
+                <a16:creationId xmlns:a16="http://schemas.microsoft.com/office/drawing/2014/main" id="{7DA22620-1989-42A9-85F9-C8228349AF52}"/>
               </a:ext>
             </a:extLst>
           </p:cNvPr>
@@ -4140,7 +4140,7 @@
           <p:cNvPr id="18" name="">
             <a:extLst xmlns:a="http://schemas.openxmlformats.org/drawingml/2006/main">
               <a:ext uri="{FF2B5EF4-FFF2-40B4-BE49-F238E27FC236}">
-                <a16:creationId xmlns:a16="http://schemas.microsoft.com/office/drawing/2014/main" id="{36D9374C-EB97-4B2A-8463-087295956B46}"/>
+                <a16:creationId xmlns:a16="http://schemas.microsoft.com/office/drawing/2014/main" id="{F3733359-01C2-4DA1-895A-EACDCFE262F3}"/>
               </a:ext>
             </a:extLst>
           </p:cNvPr>
@@ -4195,7 +4195,7 @@
     </p:spTree>
     <p:extLst>
       <p:ext uri="{BB962C8B-B14F-4D97-AF65-F5344CB8AC3E}">
-        <p14:creationId xmlns:p14="http://schemas.microsoft.com/office/powerpoint/2010/main" val="631641437"/>
+        <p14:creationId xmlns:p14="http://schemas.microsoft.com/office/powerpoint/2010/main" val="1428124735"/>
       </p:ext>
     </p:extLst>
   </p:cSld>
@@ -4350,7 +4350,7 @@
           <p:cNvPr id="23" name="">
             <a:extLst xmlns:a="http://schemas.openxmlformats.org/drawingml/2006/main">
               <a:ext uri="{FF2B5EF4-FFF2-40B4-BE49-F238E27FC236}">
-                <a16:creationId xmlns:a16="http://schemas.microsoft.com/office/drawing/2014/main" id="{41291CF7-D034-4EB4-AFA1-C29810973926}"/>
+                <a16:creationId xmlns:a16="http://schemas.microsoft.com/office/drawing/2014/main" id="{7932AA13-8F95-4F3E-AEF0-B9369E22A575}"/>
               </a:ext>
             </a:extLst>
           </p:cNvPr>
@@ -4382,7 +4382,7 @@
           <p:cNvPr id="2" name="">
             <a:extLst xmlns:a="http://schemas.openxmlformats.org/drawingml/2006/main">
               <a:ext uri="{FF2B5EF4-FFF2-40B4-BE49-F238E27FC236}">
-                <a16:creationId xmlns:a16="http://schemas.microsoft.com/office/drawing/2014/main" id="{C6736D5C-C0E5-4572-938D-E6D84BC82C1E}"/>
+                <a16:creationId xmlns:a16="http://schemas.microsoft.com/office/drawing/2014/main" id="{EC837308-09BD-4553-A1AC-39271C4291AA}"/>
               </a:ext>
             </a:extLst>
           </p:cNvPr>
@@ -4439,7 +4439,7 @@
           <p:cNvPr id="3" name="">
             <a:extLst xmlns:a="http://schemas.openxmlformats.org/drawingml/2006/main">
               <a:ext uri="{FF2B5EF4-FFF2-40B4-BE49-F238E27FC236}">
-                <a16:creationId xmlns:a16="http://schemas.microsoft.com/office/drawing/2014/main" id="{57F5224C-117E-45A9-926D-1ABCA3D86019}"/>
+                <a16:creationId xmlns:a16="http://schemas.microsoft.com/office/drawing/2014/main" id="{073D11BD-597E-45AF-97FF-832AB8E8E81E}"/>
               </a:ext>
             </a:extLst>
           </p:cNvPr>
@@ -4471,7 +4471,7 @@
           <p:cNvPr id="4" name="">
             <a:extLst xmlns:a="http://schemas.openxmlformats.org/drawingml/2006/main">
               <a:ext uri="{FF2B5EF4-FFF2-40B4-BE49-F238E27FC236}">
-                <a16:creationId xmlns:a16="http://schemas.microsoft.com/office/drawing/2014/main" id="{AE7BA415-B98A-4AEE-B9CF-7C232015624F}"/>
+                <a16:creationId xmlns:a16="http://schemas.microsoft.com/office/drawing/2014/main" id="{B5C9D7C2-BBBA-40BE-AD36-121EDC3BB869}"/>
               </a:ext>
             </a:extLst>
           </p:cNvPr>
@@ -4528,7 +4528,7 @@
           <p:cNvPr id="5" name="">
             <a:extLst xmlns:a="http://schemas.openxmlformats.org/drawingml/2006/main">
               <a:ext uri="{FF2B5EF4-FFF2-40B4-BE49-F238E27FC236}">
-                <a16:creationId xmlns:a16="http://schemas.microsoft.com/office/drawing/2014/main" id="{A8F18DC9-1113-46ED-8717-8B838B51F0EA}"/>
+                <a16:creationId xmlns:a16="http://schemas.microsoft.com/office/drawing/2014/main" id="{44D5BD55-9047-45FE-884C-4DA904F60EEE}"/>
               </a:ext>
             </a:extLst>
           </p:cNvPr>
@@ -4585,7 +4585,7 @@
           <p:cNvPr id="6" name="">
             <a:extLst xmlns:a="http://schemas.openxmlformats.org/drawingml/2006/main">
               <a:ext uri="{FF2B5EF4-FFF2-40B4-BE49-F238E27FC236}">
-                <a16:creationId xmlns:a16="http://schemas.microsoft.com/office/drawing/2014/main" id="{39F5D35B-6F95-4710-A4AB-F50B5E11109D}"/>
+                <a16:creationId xmlns:a16="http://schemas.microsoft.com/office/drawing/2014/main" id="{EA281B67-C0D9-49E1-961C-06FFFB282250}"/>
               </a:ext>
             </a:extLst>
           </p:cNvPr>
@@ -4642,7 +4642,7 @@
           <p:cNvPr id="7" name="">
             <a:extLst xmlns:a="http://schemas.openxmlformats.org/drawingml/2006/main">
               <a:ext uri="{FF2B5EF4-FFF2-40B4-BE49-F238E27FC236}">
-                <a16:creationId xmlns:a16="http://schemas.microsoft.com/office/drawing/2014/main" id="{1C652CD8-E377-480F-8C1A-F168C0047CAA}"/>
+                <a16:creationId xmlns:a16="http://schemas.microsoft.com/office/drawing/2014/main" id="{C37199F9-C718-43CC-AA24-623D55029A1A}"/>
               </a:ext>
             </a:extLst>
           </p:cNvPr>
@@ -4674,7 +4674,7 @@
           <p:cNvPr id="8" name="">
             <a:extLst xmlns:a="http://schemas.openxmlformats.org/drawingml/2006/main">
               <a:ext uri="{FF2B5EF4-FFF2-40B4-BE49-F238E27FC236}">
-                <a16:creationId xmlns:a16="http://schemas.microsoft.com/office/drawing/2014/main" id="{AA8B9D8E-BE83-4DDF-8E57-34AF6E9A5EDE}"/>
+                <a16:creationId xmlns:a16="http://schemas.microsoft.com/office/drawing/2014/main" id="{91670641-D44F-459C-BA20-3F26CD3E68C5}"/>
               </a:ext>
             </a:extLst>
           </p:cNvPr>
@@ -4731,7 +4731,7 @@
           <p:cNvPr id="9" name="">
             <a:extLst xmlns:a="http://schemas.openxmlformats.org/drawingml/2006/main">
               <a:ext uri="{FF2B5EF4-FFF2-40B4-BE49-F238E27FC236}">
-                <a16:creationId xmlns:a16="http://schemas.microsoft.com/office/drawing/2014/main" id="{5E5B1733-188F-4AA6-8C39-7A866453309F}"/>
+                <a16:creationId xmlns:a16="http://schemas.microsoft.com/office/drawing/2014/main" id="{1D5FF81A-FD52-4B6A-BB82-B2EF33656B1A}"/>
               </a:ext>
             </a:extLst>
           </p:cNvPr>
@@ -4788,7 +4788,7 @@
           <p:cNvPr id="10" name="">
             <a:extLst xmlns:a="http://schemas.openxmlformats.org/drawingml/2006/main">
               <a:ext uri="{FF2B5EF4-FFF2-40B4-BE49-F238E27FC236}">
-                <a16:creationId xmlns:a16="http://schemas.microsoft.com/office/drawing/2014/main" id="{CCAF76D1-27BF-4CDF-854F-6BF08FD43FA1}"/>
+                <a16:creationId xmlns:a16="http://schemas.microsoft.com/office/drawing/2014/main" id="{AA7EC260-ABB4-4244-8A8E-0EF59B5850C8}"/>
               </a:ext>
             </a:extLst>
           </p:cNvPr>
@@ -4822,7 +4822,7 @@
           <p:cNvPr id="11" name="">
             <a:extLst xmlns:a="http://schemas.openxmlformats.org/drawingml/2006/main">
               <a:ext uri="{FF2B5EF4-FFF2-40B4-BE49-F238E27FC236}">
-                <a16:creationId xmlns:a16="http://schemas.microsoft.com/office/drawing/2014/main" id="{F7330ED1-A36B-4D5B-B474-9BC219E378B3}"/>
+                <a16:creationId xmlns:a16="http://schemas.microsoft.com/office/drawing/2014/main" id="{F40B1027-F64C-42DC-ACE2-85ABFD49AEE1}"/>
               </a:ext>
             </a:extLst>
           </p:cNvPr>
@@ -4854,7 +4854,7 @@
           <p:cNvPr id="12" name="">
             <a:extLst xmlns:a="http://schemas.openxmlformats.org/drawingml/2006/main">
               <a:ext uri="{FF2B5EF4-FFF2-40B4-BE49-F238E27FC236}">
-                <a16:creationId xmlns:a16="http://schemas.microsoft.com/office/drawing/2014/main" id="{4A7B122D-4A82-4FF8-BC08-3B8307F719A0}"/>
+                <a16:creationId xmlns:a16="http://schemas.microsoft.com/office/drawing/2014/main" id="{E4FBFD4E-E019-4433-BE92-CF5E34C305D3}"/>
               </a:ext>
             </a:extLst>
           </p:cNvPr>
@@ -4911,7 +4911,7 @@
           <p:cNvPr id="13" name="">
             <a:extLst xmlns:a="http://schemas.openxmlformats.org/drawingml/2006/main">
               <a:ext uri="{FF2B5EF4-FFF2-40B4-BE49-F238E27FC236}">
-                <a16:creationId xmlns:a16="http://schemas.microsoft.com/office/drawing/2014/main" id="{18A1C08E-0BD1-445A-96ED-436C56CCCA60}"/>
+                <a16:creationId xmlns:a16="http://schemas.microsoft.com/office/drawing/2014/main" id="{5CA0B86C-288D-410D-B121-970ECFB6DCB5}"/>
               </a:ext>
             </a:extLst>
           </p:cNvPr>
@@ -4968,7 +4968,7 @@
           <p:cNvPr id="14" name="">
             <a:extLst xmlns:a="http://schemas.openxmlformats.org/drawingml/2006/main">
               <a:ext uri="{FF2B5EF4-FFF2-40B4-BE49-F238E27FC236}">
-                <a16:creationId xmlns:a16="http://schemas.microsoft.com/office/drawing/2014/main" id="{0F203F7B-F14F-48BD-B16D-85335D9138F0}"/>
+                <a16:creationId xmlns:a16="http://schemas.microsoft.com/office/drawing/2014/main" id="{9F6F338C-71C3-4631-B206-D28E2984B75A}"/>
               </a:ext>
             </a:extLst>
           </p:cNvPr>
@@ -5002,7 +5002,7 @@
           <p:cNvPr id="15" name="">
             <a:extLst xmlns:a="http://schemas.openxmlformats.org/drawingml/2006/main">
               <a:ext uri="{FF2B5EF4-FFF2-40B4-BE49-F238E27FC236}">
-                <a16:creationId xmlns:a16="http://schemas.microsoft.com/office/drawing/2014/main" id="{9CA86A59-C32F-4B73-9AC9-98889B18329C}"/>
+                <a16:creationId xmlns:a16="http://schemas.microsoft.com/office/drawing/2014/main" id="{2E89EF68-B6F4-44B7-ACAA-0B33A4D84235}"/>
               </a:ext>
             </a:extLst>
           </p:cNvPr>
@@ -5034,7 +5034,7 @@
           <p:cNvPr id="16" name="">
             <a:extLst xmlns:a="http://schemas.openxmlformats.org/drawingml/2006/main">
               <a:ext uri="{FF2B5EF4-FFF2-40B4-BE49-F238E27FC236}">
-                <a16:creationId xmlns:a16="http://schemas.microsoft.com/office/drawing/2014/main" id="{8DEF1EF7-579C-484F-B035-07DF6D7F9BB3}"/>
+                <a16:creationId xmlns:a16="http://schemas.microsoft.com/office/drawing/2014/main" id="{CFF835F5-8A52-4035-9EC9-C19627431DA6}"/>
               </a:ext>
             </a:extLst>
           </p:cNvPr>
@@ -5091,7 +5091,7 @@
           <p:cNvPr id="17" name="">
             <a:extLst xmlns:a="http://schemas.openxmlformats.org/drawingml/2006/main">
               <a:ext uri="{FF2B5EF4-FFF2-40B4-BE49-F238E27FC236}">
-                <a16:creationId xmlns:a16="http://schemas.microsoft.com/office/drawing/2014/main" id="{A741DCE9-93F9-43DF-A5F6-55E6053DC02B}"/>
+                <a16:creationId xmlns:a16="http://schemas.microsoft.com/office/drawing/2014/main" id="{778FA54A-6208-4223-95B0-502DEC925FDD}"/>
               </a:ext>
             </a:extLst>
           </p:cNvPr>
@@ -5148,7 +5148,7 @@
           <p:cNvPr id="18" name="">
             <a:extLst xmlns:a="http://schemas.openxmlformats.org/drawingml/2006/main">
               <a:ext uri="{FF2B5EF4-FFF2-40B4-BE49-F238E27FC236}">
-                <a16:creationId xmlns:a16="http://schemas.microsoft.com/office/drawing/2014/main" id="{9E8ABECC-0F3D-4B7B-B268-BACB8FABEBF2}"/>
+                <a16:creationId xmlns:a16="http://schemas.microsoft.com/office/drawing/2014/main" id="{EA871D49-B7E5-4E68-AEE6-D18A6DEDF8EC}"/>
               </a:ext>
             </a:extLst>
           </p:cNvPr>
@@ -5182,7 +5182,7 @@
           <p:cNvPr id="19" name="">
             <a:extLst xmlns:a="http://schemas.openxmlformats.org/drawingml/2006/main">
               <a:ext uri="{FF2B5EF4-FFF2-40B4-BE49-F238E27FC236}">
-                <a16:creationId xmlns:a16="http://schemas.microsoft.com/office/drawing/2014/main" id="{01190C89-A10F-47BF-BE6E-96948857A112}"/>
+                <a16:creationId xmlns:a16="http://schemas.microsoft.com/office/drawing/2014/main" id="{D6166F59-6831-4827-B8C2-B79DE631CD7C}"/>
               </a:ext>
             </a:extLst>
           </p:cNvPr>
@@ -5214,7 +5214,7 @@
           <p:cNvPr id="20" name="">
             <a:extLst xmlns:a="http://schemas.openxmlformats.org/drawingml/2006/main">
               <a:ext uri="{FF2B5EF4-FFF2-40B4-BE49-F238E27FC236}">
-                <a16:creationId xmlns:a16="http://schemas.microsoft.com/office/drawing/2014/main" id="{00778C86-CE0D-479E-B135-698AC03BA7BA}"/>
+                <a16:creationId xmlns:a16="http://schemas.microsoft.com/office/drawing/2014/main" id="{0DA6F122-AC6A-4111-89E2-B32AAA1588BD}"/>
               </a:ext>
             </a:extLst>
           </p:cNvPr>
@@ -5271,7 +5271,7 @@
           <p:cNvPr id="21" name="">
             <a:extLst xmlns:a="http://schemas.openxmlformats.org/drawingml/2006/main">
               <a:ext uri="{FF2B5EF4-FFF2-40B4-BE49-F238E27FC236}">
-                <a16:creationId xmlns:a16="http://schemas.microsoft.com/office/drawing/2014/main" id="{9C87E83D-654D-4161-BB40-C895D8E7A095}"/>
+                <a16:creationId xmlns:a16="http://schemas.microsoft.com/office/drawing/2014/main" id="{D4F345EF-0786-4A89-976A-D3393DCD2310}"/>
               </a:ext>
             </a:extLst>
           </p:cNvPr>
@@ -5328,7 +5328,7 @@
           <p:cNvPr id="22" name="">
             <a:extLst xmlns:a="http://schemas.openxmlformats.org/drawingml/2006/main">
               <a:ext uri="{FF2B5EF4-FFF2-40B4-BE49-F238E27FC236}">
-                <a16:creationId xmlns:a16="http://schemas.microsoft.com/office/drawing/2014/main" id="{35B6A9AC-B6C5-4C5E-A858-E36ACB81DA91}"/>
+                <a16:creationId xmlns:a16="http://schemas.microsoft.com/office/drawing/2014/main" id="{8DF3F574-C1B4-4256-9609-B8FA846B348E}"/>
               </a:ext>
             </a:extLst>
           </p:cNvPr>
@@ -5383,7 +5383,7 @@
     </p:spTree>
     <p:extLst>
       <p:ext uri="{BB962C8B-B14F-4D97-AF65-F5344CB8AC3E}">
-        <p14:creationId xmlns:p14="http://schemas.microsoft.com/office/powerpoint/2010/main" val="1357827222"/>
+        <p14:creationId xmlns:p14="http://schemas.microsoft.com/office/powerpoint/2010/main" val="185561614"/>
       </p:ext>
     </p:extLst>
   </p:cSld>
@@ -5584,7 +5584,7 @@
           <p:cNvPr id="23" name="">
             <a:extLst xmlns:a="http://schemas.openxmlformats.org/drawingml/2006/main">
               <a:ext uri="{FF2B5EF4-FFF2-40B4-BE49-F238E27FC236}">
-                <a16:creationId xmlns:a16="http://schemas.microsoft.com/office/drawing/2014/main" id="{EC73A97F-CEB0-4A71-AAD1-6C3548CD9AD0}"/>
+                <a16:creationId xmlns:a16="http://schemas.microsoft.com/office/drawing/2014/main" id="{D2A1219C-0E2F-44C8-ACA7-BC6C2C496902}"/>
               </a:ext>
             </a:extLst>
           </p:cNvPr>
@@ -5616,7 +5616,7 @@
           <p:cNvPr id="2" name="">
             <a:extLst xmlns:a="http://schemas.openxmlformats.org/drawingml/2006/main">
               <a:ext uri="{FF2B5EF4-FFF2-40B4-BE49-F238E27FC236}">
-                <a16:creationId xmlns:a16="http://schemas.microsoft.com/office/drawing/2014/main" id="{F39C47BD-58E9-4A0F-A7B4-DFDC2ED6AECF}"/>
+                <a16:creationId xmlns:a16="http://schemas.microsoft.com/office/drawing/2014/main" id="{DE2417A0-B346-4626-87EA-95E16D2C1F20}"/>
               </a:ext>
             </a:extLst>
           </p:cNvPr>
@@ -5673,7 +5673,7 @@
           <p:cNvPr id="3" name="">
             <a:extLst xmlns:a="http://schemas.openxmlformats.org/drawingml/2006/main">
               <a:ext uri="{FF2B5EF4-FFF2-40B4-BE49-F238E27FC236}">
-                <a16:creationId xmlns:a16="http://schemas.microsoft.com/office/drawing/2014/main" id="{FBB5F57E-D6FB-4DA9-BD1F-B0EEE2921C10}"/>
+                <a16:creationId xmlns:a16="http://schemas.microsoft.com/office/drawing/2014/main" id="{FCF88F4E-E2D0-40D7-AA5C-0BE6717A00FB}"/>
               </a:ext>
             </a:extLst>
           </p:cNvPr>
@@ -5705,7 +5705,7 @@
           <p:cNvPr id="4" name="">
             <a:extLst xmlns:a="http://schemas.openxmlformats.org/drawingml/2006/main">
               <a:ext uri="{FF2B5EF4-FFF2-40B4-BE49-F238E27FC236}">
-                <a16:creationId xmlns:a16="http://schemas.microsoft.com/office/drawing/2014/main" id="{3E910864-EBFC-4CD3-90B2-D73FFCAFCCAE}"/>
+                <a16:creationId xmlns:a16="http://schemas.microsoft.com/office/drawing/2014/main" id="{65581F99-7733-4DB8-ACD0-FEBB22253A9B}"/>
               </a:ext>
             </a:extLst>
           </p:cNvPr>
@@ -5762,7 +5762,7 @@
           <p:cNvPr id="5" name="">
             <a:extLst xmlns:a="http://schemas.openxmlformats.org/drawingml/2006/main">
               <a:ext uri="{FF2B5EF4-FFF2-40B4-BE49-F238E27FC236}">
-                <a16:creationId xmlns:a16="http://schemas.microsoft.com/office/drawing/2014/main" id="{324F70F5-1FEF-48AF-B876-7CB9771F6345}"/>
+                <a16:creationId xmlns:a16="http://schemas.microsoft.com/office/drawing/2014/main" id="{3C3844FA-D38C-463F-B1C1-DAAF03DEA1F6}"/>
               </a:ext>
             </a:extLst>
           </p:cNvPr>
@@ -5819,7 +5819,7 @@
           <p:cNvPr id="6" name="">
             <a:extLst xmlns:a="http://schemas.openxmlformats.org/drawingml/2006/main">
               <a:ext uri="{FF2B5EF4-FFF2-40B4-BE49-F238E27FC236}">
-                <a16:creationId xmlns:a16="http://schemas.microsoft.com/office/drawing/2014/main" id="{67C0EE31-0836-4C24-A393-49A529F35972}"/>
+                <a16:creationId xmlns:a16="http://schemas.microsoft.com/office/drawing/2014/main" id="{8715BA96-4101-4E0C-BBA7-725A405AA55C}"/>
               </a:ext>
             </a:extLst>
           </p:cNvPr>
@@ -5876,7 +5876,7 @@
           <p:cNvPr id="7" name="">
             <a:extLst xmlns:a="http://schemas.openxmlformats.org/drawingml/2006/main">
               <a:ext uri="{FF2B5EF4-FFF2-40B4-BE49-F238E27FC236}">
-                <a16:creationId xmlns:a16="http://schemas.microsoft.com/office/drawing/2014/main" id="{A970F173-7208-47AD-BFB1-BC749D6909EF}"/>
+                <a16:creationId xmlns:a16="http://schemas.microsoft.com/office/drawing/2014/main" id="{8913AC72-0618-4962-98D4-2C56094E1509}"/>
               </a:ext>
             </a:extLst>
           </p:cNvPr>
@@ -5908,7 +5908,7 @@
           <p:cNvPr id="8" name="">
             <a:extLst xmlns:a="http://schemas.openxmlformats.org/drawingml/2006/main">
               <a:ext uri="{FF2B5EF4-FFF2-40B4-BE49-F238E27FC236}">
-                <a16:creationId xmlns:a16="http://schemas.microsoft.com/office/drawing/2014/main" id="{4A8F3710-C9DE-4434-864F-2F7F969F05E0}"/>
+                <a16:creationId xmlns:a16="http://schemas.microsoft.com/office/drawing/2014/main" id="{5A1D3027-C5A6-4B5B-9F04-80163E89626F}"/>
               </a:ext>
             </a:extLst>
           </p:cNvPr>
@@ -5965,7 +5965,7 @@
           <p:cNvPr id="9" name="">
             <a:extLst xmlns:a="http://schemas.openxmlformats.org/drawingml/2006/main">
               <a:ext uri="{FF2B5EF4-FFF2-40B4-BE49-F238E27FC236}">
-                <a16:creationId xmlns:a16="http://schemas.microsoft.com/office/drawing/2014/main" id="{758A8E5B-0749-43EF-85D9-41C4C5B7AFFC}"/>
+                <a16:creationId xmlns:a16="http://schemas.microsoft.com/office/drawing/2014/main" id="{1988CB6F-0D89-4421-B0F9-E01BD70344B1}"/>
               </a:ext>
             </a:extLst>
           </p:cNvPr>
@@ -6022,7 +6022,7 @@
           <p:cNvPr id="10" name="">
             <a:extLst xmlns:a="http://schemas.openxmlformats.org/drawingml/2006/main">
               <a:ext uri="{FF2B5EF4-FFF2-40B4-BE49-F238E27FC236}">
-                <a16:creationId xmlns:a16="http://schemas.microsoft.com/office/drawing/2014/main" id="{1A43C8E7-A76F-4492-AC5A-85AC71C32256}"/>
+                <a16:creationId xmlns:a16="http://schemas.microsoft.com/office/drawing/2014/main" id="{125BEB11-0FBC-4B21-B523-0711E664C53B}"/>
               </a:ext>
             </a:extLst>
           </p:cNvPr>
@@ -6056,7 +6056,7 @@
           <p:cNvPr id="11" name="">
             <a:extLst xmlns:a="http://schemas.openxmlformats.org/drawingml/2006/main">
               <a:ext uri="{FF2B5EF4-FFF2-40B4-BE49-F238E27FC236}">
-                <a16:creationId xmlns:a16="http://schemas.microsoft.com/office/drawing/2014/main" id="{ADB9A7AE-EBB7-4494-A9E8-8132E5321DD9}"/>
+                <a16:creationId xmlns:a16="http://schemas.microsoft.com/office/drawing/2014/main" id="{67C71EBD-4021-4547-A2CF-698AA205FC51}"/>
               </a:ext>
             </a:extLst>
           </p:cNvPr>
@@ -6088,7 +6088,7 @@
           <p:cNvPr id="12" name="">
             <a:extLst xmlns:a="http://schemas.openxmlformats.org/drawingml/2006/main">
               <a:ext uri="{FF2B5EF4-FFF2-40B4-BE49-F238E27FC236}">
-                <a16:creationId xmlns:a16="http://schemas.microsoft.com/office/drawing/2014/main" id="{45DE82D8-C5AA-4ACD-887A-C13097C30F5B}"/>
+                <a16:creationId xmlns:a16="http://schemas.microsoft.com/office/drawing/2014/main" id="{24405F45-8110-4726-AC80-E639721809EE}"/>
               </a:ext>
             </a:extLst>
           </p:cNvPr>
@@ -6145,7 +6145,7 @@
           <p:cNvPr id="13" name="">
             <a:extLst xmlns:a="http://schemas.openxmlformats.org/drawingml/2006/main">
               <a:ext uri="{FF2B5EF4-FFF2-40B4-BE49-F238E27FC236}">
-                <a16:creationId xmlns:a16="http://schemas.microsoft.com/office/drawing/2014/main" id="{32DB7DCB-151D-4FBD-9AFA-1512AD3AF5A8}"/>
+                <a16:creationId xmlns:a16="http://schemas.microsoft.com/office/drawing/2014/main" id="{35252896-5FAB-43B0-BDBD-F0D9CDD78752}"/>
               </a:ext>
             </a:extLst>
           </p:cNvPr>
@@ -6202,7 +6202,7 @@
           <p:cNvPr id="14" name="">
             <a:extLst xmlns:a="http://schemas.openxmlformats.org/drawingml/2006/main">
               <a:ext uri="{FF2B5EF4-FFF2-40B4-BE49-F238E27FC236}">
-                <a16:creationId xmlns:a16="http://schemas.microsoft.com/office/drawing/2014/main" id="{FCD749D4-DABF-4659-A5A9-479AFE4175E4}"/>
+                <a16:creationId xmlns:a16="http://schemas.microsoft.com/office/drawing/2014/main" id="{A11F7C26-6351-4690-9A32-4F164F167C39}"/>
               </a:ext>
             </a:extLst>
           </p:cNvPr>
@@ -6236,7 +6236,7 @@
           <p:cNvPr id="15" name="">
             <a:extLst xmlns:a="http://schemas.openxmlformats.org/drawingml/2006/main">
               <a:ext uri="{FF2B5EF4-FFF2-40B4-BE49-F238E27FC236}">
-                <a16:creationId xmlns:a16="http://schemas.microsoft.com/office/drawing/2014/main" id="{78C6F374-A55A-4E1B-A14A-7F58F82EB623}"/>
+                <a16:creationId xmlns:a16="http://schemas.microsoft.com/office/drawing/2014/main" id="{DD3EAC0D-D041-4154-89F1-B5AB19D8F5D5}"/>
               </a:ext>
             </a:extLst>
           </p:cNvPr>
@@ -6268,7 +6268,7 @@
           <p:cNvPr id="16" name="">
             <a:extLst xmlns:a="http://schemas.openxmlformats.org/drawingml/2006/main">
               <a:ext uri="{FF2B5EF4-FFF2-40B4-BE49-F238E27FC236}">
-                <a16:creationId xmlns:a16="http://schemas.microsoft.com/office/drawing/2014/main" id="{3FA23F4C-E353-4654-BC9B-D4199EBCB62D}"/>
+                <a16:creationId xmlns:a16="http://schemas.microsoft.com/office/drawing/2014/main" id="{C334C9BC-BA21-4AB8-B2CB-F4736D991765}"/>
               </a:ext>
             </a:extLst>
           </p:cNvPr>
@@ -6325,7 +6325,7 @@
           <p:cNvPr id="17" name="">
             <a:extLst xmlns:a="http://schemas.openxmlformats.org/drawingml/2006/main">
               <a:ext uri="{FF2B5EF4-FFF2-40B4-BE49-F238E27FC236}">
-                <a16:creationId xmlns:a16="http://schemas.microsoft.com/office/drawing/2014/main" id="{68420F29-58E5-440F-8D4A-306177AEF830}"/>
+                <a16:creationId xmlns:a16="http://schemas.microsoft.com/office/drawing/2014/main" id="{2BC01DA4-A22A-4A9E-B05C-E23C79C1A15D}"/>
               </a:ext>
             </a:extLst>
           </p:cNvPr>
@@ -6382,7 +6382,7 @@
           <p:cNvPr id="18" name="">
             <a:extLst xmlns:a="http://schemas.openxmlformats.org/drawingml/2006/main">
               <a:ext uri="{FF2B5EF4-FFF2-40B4-BE49-F238E27FC236}">
-                <a16:creationId xmlns:a16="http://schemas.microsoft.com/office/drawing/2014/main" id="{32293C9E-0D75-4795-8C91-93B9AB3DC382}"/>
+                <a16:creationId xmlns:a16="http://schemas.microsoft.com/office/drawing/2014/main" id="{4931BC9A-673E-4BAC-B808-36199A06692B}"/>
               </a:ext>
             </a:extLst>
           </p:cNvPr>
@@ -6416,7 +6416,7 @@
           <p:cNvPr id="19" name="">
             <a:extLst xmlns:a="http://schemas.openxmlformats.org/drawingml/2006/main">
               <a:ext uri="{FF2B5EF4-FFF2-40B4-BE49-F238E27FC236}">
-                <a16:creationId xmlns:a16="http://schemas.microsoft.com/office/drawing/2014/main" id="{F0A8CBA2-C289-4A09-AE77-ED798C7880E5}"/>
+                <a16:creationId xmlns:a16="http://schemas.microsoft.com/office/drawing/2014/main" id="{1AB68EFD-85EA-45CE-828C-E7EDB2C485C2}"/>
               </a:ext>
             </a:extLst>
           </p:cNvPr>
@@ -6448,7 +6448,7 @@
           <p:cNvPr id="20" name="">
             <a:extLst xmlns:a="http://schemas.openxmlformats.org/drawingml/2006/main">
               <a:ext uri="{FF2B5EF4-FFF2-40B4-BE49-F238E27FC236}">
-                <a16:creationId xmlns:a16="http://schemas.microsoft.com/office/drawing/2014/main" id="{09F998A2-E826-440E-99BB-3F712FEBE83B}"/>
+                <a16:creationId xmlns:a16="http://schemas.microsoft.com/office/drawing/2014/main" id="{B06EA2DA-5BA8-4DF7-9FC4-9AB2C889E3BD}"/>
               </a:ext>
             </a:extLst>
           </p:cNvPr>
@@ -6505,7 +6505,7 @@
           <p:cNvPr id="21" name="">
             <a:extLst xmlns:a="http://schemas.openxmlformats.org/drawingml/2006/main">
               <a:ext uri="{FF2B5EF4-FFF2-40B4-BE49-F238E27FC236}">
-                <a16:creationId xmlns:a16="http://schemas.microsoft.com/office/drawing/2014/main" id="{65EE9031-4713-4EE7-BD45-1CA2F0B11CB2}"/>
+                <a16:creationId xmlns:a16="http://schemas.microsoft.com/office/drawing/2014/main" id="{719DCDC3-58A7-40C6-A325-310DC50A3034}"/>
               </a:ext>
             </a:extLst>
           </p:cNvPr>
@@ -6562,7 +6562,7 @@
           <p:cNvPr id="22" name="">
             <a:extLst xmlns:a="http://schemas.openxmlformats.org/drawingml/2006/main">
               <a:ext uri="{FF2B5EF4-FFF2-40B4-BE49-F238E27FC236}">
-                <a16:creationId xmlns:a16="http://schemas.microsoft.com/office/drawing/2014/main" id="{EB7FFBDB-96A4-4FC6-8411-0BBEFDC42D1D}"/>
+                <a16:creationId xmlns:a16="http://schemas.microsoft.com/office/drawing/2014/main" id="{1E24BB40-BB57-445A-A55C-8E1317B7DC20}"/>
               </a:ext>
             </a:extLst>
           </p:cNvPr>
@@ -6617,7 +6617,7 @@
     </p:spTree>
     <p:extLst>
       <p:ext uri="{BB962C8B-B14F-4D97-AF65-F5344CB8AC3E}">
-        <p14:creationId xmlns:p14="http://schemas.microsoft.com/office/powerpoint/2010/main" val="147141669"/>
+        <p14:creationId xmlns:p14="http://schemas.microsoft.com/office/powerpoint/2010/main" val="592874447"/>
       </p:ext>
     </p:extLst>
   </p:cSld>
@@ -6818,7 +6818,7 @@
           <p:cNvPr id="16" name="">
             <a:extLst xmlns:a="http://schemas.openxmlformats.org/drawingml/2006/main">
               <a:ext uri="{FF2B5EF4-FFF2-40B4-BE49-F238E27FC236}">
-                <a16:creationId xmlns:a16="http://schemas.microsoft.com/office/drawing/2014/main" id="{6FB9195F-3195-4C18-A6E0-40EC78135ACA}"/>
+                <a16:creationId xmlns:a16="http://schemas.microsoft.com/office/drawing/2014/main" id="{65A9439E-2227-41B0-9E07-B7808DFAB5A9}"/>
               </a:ext>
             </a:extLst>
           </p:cNvPr>
@@ -6850,7 +6850,7 @@
           <p:cNvPr id="2" name="">
             <a:extLst xmlns:a="http://schemas.openxmlformats.org/drawingml/2006/main">
               <a:ext uri="{FF2B5EF4-FFF2-40B4-BE49-F238E27FC236}">
-                <a16:creationId xmlns:a16="http://schemas.microsoft.com/office/drawing/2014/main" id="{EAB89338-F252-43CA-B819-AA0D3C52AB0D}"/>
+                <a16:creationId xmlns:a16="http://schemas.microsoft.com/office/drawing/2014/main" id="{2D0D5DC3-7D46-40B2-8726-D30E5A39FFA4}"/>
               </a:ext>
             </a:extLst>
           </p:cNvPr>
@@ -6907,7 +6907,7 @@
           <p:cNvPr id="3" name="">
             <a:extLst xmlns:a="http://schemas.openxmlformats.org/drawingml/2006/main">
               <a:ext uri="{FF2B5EF4-FFF2-40B4-BE49-F238E27FC236}">
-                <a16:creationId xmlns:a16="http://schemas.microsoft.com/office/drawing/2014/main" id="{C80DA4AF-365D-4C16-BAB4-337F71C7A35B}"/>
+                <a16:creationId xmlns:a16="http://schemas.microsoft.com/office/drawing/2014/main" id="{CA612ED7-E3EE-457E-B2FD-1DB04DA63168}"/>
               </a:ext>
             </a:extLst>
           </p:cNvPr>
@@ -6939,7 +6939,7 @@
           <p:cNvPr id="4" name="">
             <a:extLst xmlns:a="http://schemas.openxmlformats.org/drawingml/2006/main">
               <a:ext uri="{FF2B5EF4-FFF2-40B4-BE49-F238E27FC236}">
-                <a16:creationId xmlns:a16="http://schemas.microsoft.com/office/drawing/2014/main" id="{1978417C-F4FB-444A-BE1C-435CC0DF8D99}"/>
+                <a16:creationId xmlns:a16="http://schemas.microsoft.com/office/drawing/2014/main" id="{5B60F8DE-0310-4B7F-BD98-3F10ECEF9768}"/>
               </a:ext>
             </a:extLst>
           </p:cNvPr>
@@ -6996,7 +6996,7 @@
           <p:cNvPr id="5" name="">
             <a:extLst xmlns:a="http://schemas.openxmlformats.org/drawingml/2006/main">
               <a:ext uri="{FF2B5EF4-FFF2-40B4-BE49-F238E27FC236}">
-                <a16:creationId xmlns:a16="http://schemas.microsoft.com/office/drawing/2014/main" id="{5FBBB6E0-2F6C-490C-92CD-5F39BEE43047}"/>
+                <a16:creationId xmlns:a16="http://schemas.microsoft.com/office/drawing/2014/main" id="{54599E22-B717-4421-8846-8DD0F1E982C3}"/>
               </a:ext>
             </a:extLst>
           </p:cNvPr>
@@ -7053,7 +7053,7 @@
           <p:cNvPr id="6" name="">
             <a:extLst xmlns:a="http://schemas.openxmlformats.org/drawingml/2006/main">
               <a:ext uri="{FF2B5EF4-FFF2-40B4-BE49-F238E27FC236}">
-                <a16:creationId xmlns:a16="http://schemas.microsoft.com/office/drawing/2014/main" id="{87ECC146-88BE-4C77-88BF-57EC81E49023}"/>
+                <a16:creationId xmlns:a16="http://schemas.microsoft.com/office/drawing/2014/main" id="{007E22B5-1266-4E36-BD33-702480BA71B2}"/>
               </a:ext>
             </a:extLst>
           </p:cNvPr>
@@ -7110,7 +7110,7 @@
           <p:cNvPr id="7" name="">
             <a:extLst xmlns:a="http://schemas.openxmlformats.org/drawingml/2006/main">
               <a:ext uri="{FF2B5EF4-FFF2-40B4-BE49-F238E27FC236}">
-                <a16:creationId xmlns:a16="http://schemas.microsoft.com/office/drawing/2014/main" id="{B5D3B82F-0946-4C3D-99B1-F10E082A91C4}"/>
+                <a16:creationId xmlns:a16="http://schemas.microsoft.com/office/drawing/2014/main" id="{B1C82580-7773-43AC-9D9E-D20036390007}"/>
               </a:ext>
             </a:extLst>
           </p:cNvPr>
@@ -7142,7 +7142,7 @@
           <p:cNvPr id="8" name="">
             <a:extLst xmlns:a="http://schemas.openxmlformats.org/drawingml/2006/main">
               <a:ext uri="{FF2B5EF4-FFF2-40B4-BE49-F238E27FC236}">
-                <a16:creationId xmlns:a16="http://schemas.microsoft.com/office/drawing/2014/main" id="{272A5591-0726-4B9B-9DCB-DBC59C325374}"/>
+                <a16:creationId xmlns:a16="http://schemas.microsoft.com/office/drawing/2014/main" id="{C508ABD5-58FA-4E80-9A1E-E1EC60D8BAAC}"/>
               </a:ext>
             </a:extLst>
           </p:cNvPr>
@@ -7199,7 +7199,7 @@
           <p:cNvPr id="9" name="">
             <a:extLst xmlns:a="http://schemas.openxmlformats.org/drawingml/2006/main">
               <a:ext uri="{FF2B5EF4-FFF2-40B4-BE49-F238E27FC236}">
-                <a16:creationId xmlns:a16="http://schemas.microsoft.com/office/drawing/2014/main" id="{F6469998-481E-40CA-ACB6-FDBE387BFD8B}"/>
+                <a16:creationId xmlns:a16="http://schemas.microsoft.com/office/drawing/2014/main" id="{79C9B730-E43B-4800-B48E-848382612D1E}"/>
               </a:ext>
             </a:extLst>
           </p:cNvPr>
@@ -7256,7 +7256,7 @@
           <p:cNvPr id="10" name="">
             <a:extLst xmlns:a="http://schemas.openxmlformats.org/drawingml/2006/main">
               <a:ext uri="{FF2B5EF4-FFF2-40B4-BE49-F238E27FC236}">
-                <a16:creationId xmlns:a16="http://schemas.microsoft.com/office/drawing/2014/main" id="{73A4E462-24B5-470D-B7BC-595827878FDE}"/>
+                <a16:creationId xmlns:a16="http://schemas.microsoft.com/office/drawing/2014/main" id="{734AD5FA-6B51-429E-ADE0-4DD4723CC25F}"/>
               </a:ext>
             </a:extLst>
           </p:cNvPr>
@@ -7313,7 +7313,7 @@
           <p:cNvPr id="11" name="">
             <a:extLst xmlns:a="http://schemas.openxmlformats.org/drawingml/2006/main">
               <a:ext uri="{FF2B5EF4-FFF2-40B4-BE49-F238E27FC236}">
-                <a16:creationId xmlns:a16="http://schemas.microsoft.com/office/drawing/2014/main" id="{2C3C30EB-C08D-400F-BE21-C32D128EF655}"/>
+                <a16:creationId xmlns:a16="http://schemas.microsoft.com/office/drawing/2014/main" id="{C883D5B9-487A-4F5C-A009-EBFBBE65F0FF}"/>
               </a:ext>
             </a:extLst>
           </p:cNvPr>
@@ -7345,7 +7345,7 @@
           <p:cNvPr id="12" name="">
             <a:extLst xmlns:a="http://schemas.openxmlformats.org/drawingml/2006/main">
               <a:ext uri="{FF2B5EF4-FFF2-40B4-BE49-F238E27FC236}">
-                <a16:creationId xmlns:a16="http://schemas.microsoft.com/office/drawing/2014/main" id="{30072535-FC29-4D8C-ACA4-571BE04807BF}"/>
+                <a16:creationId xmlns:a16="http://schemas.microsoft.com/office/drawing/2014/main" id="{C56BF4E2-9123-444A-BED5-E2AAB55DE33F}"/>
               </a:ext>
             </a:extLst>
           </p:cNvPr>
@@ -7402,7 +7402,7 @@
           <p:cNvPr id="13" name="">
             <a:extLst xmlns:a="http://schemas.openxmlformats.org/drawingml/2006/main">
               <a:ext uri="{FF2B5EF4-FFF2-40B4-BE49-F238E27FC236}">
-                <a16:creationId xmlns:a16="http://schemas.microsoft.com/office/drawing/2014/main" id="{F4FEE359-6F8F-4AE8-892F-DE03AA34D70C}"/>
+                <a16:creationId xmlns:a16="http://schemas.microsoft.com/office/drawing/2014/main" id="{A3F97A37-81A9-4CC6-8AFE-04661A7A0754}"/>
               </a:ext>
             </a:extLst>
           </p:cNvPr>
@@ -7459,7 +7459,7 @@
           <p:cNvPr id="14" name="">
             <a:extLst xmlns:a="http://schemas.openxmlformats.org/drawingml/2006/main">
               <a:ext uri="{FF2B5EF4-FFF2-40B4-BE49-F238E27FC236}">
-                <a16:creationId xmlns:a16="http://schemas.microsoft.com/office/drawing/2014/main" id="{AA35DC81-C5B6-424B-BA96-8DF4A0C919F8}"/>
+                <a16:creationId xmlns:a16="http://schemas.microsoft.com/office/drawing/2014/main" id="{9CD0B030-ABC9-4F3E-A350-DA0DB504521A}"/>
               </a:ext>
             </a:extLst>
           </p:cNvPr>
@@ -7516,7 +7516,7 @@
           <p:cNvPr id="15" name="">
             <a:extLst xmlns:a="http://schemas.openxmlformats.org/drawingml/2006/main">
               <a:ext uri="{FF2B5EF4-FFF2-40B4-BE49-F238E27FC236}">
-                <a16:creationId xmlns:a16="http://schemas.microsoft.com/office/drawing/2014/main" id="{B661E857-F836-48BD-B720-DD8B5F34BDEA}"/>
+                <a16:creationId xmlns:a16="http://schemas.microsoft.com/office/drawing/2014/main" id="{FBA0D81A-45CF-481A-943D-91D6A6FD6E2C}"/>
               </a:ext>
             </a:extLst>
           </p:cNvPr>
@@ -7571,7 +7571,7 @@
     </p:spTree>
     <p:extLst>
       <p:ext uri="{BB962C8B-B14F-4D97-AF65-F5344CB8AC3E}">
-        <p14:creationId xmlns:p14="http://schemas.microsoft.com/office/powerpoint/2010/main" val="963122100"/>
+        <p14:creationId xmlns:p14="http://schemas.microsoft.com/office/powerpoint/2010/main" val="1588090421"/>
       </p:ext>
     </p:extLst>
   </p:cSld>
@@ -7772,7 +7772,7 @@
           <p:cNvPr id="23" name="">
             <a:extLst xmlns:a="http://schemas.openxmlformats.org/drawingml/2006/main">
               <a:ext uri="{FF2B5EF4-FFF2-40B4-BE49-F238E27FC236}">
-                <a16:creationId xmlns:a16="http://schemas.microsoft.com/office/drawing/2014/main" id="{34322E7F-BBCF-490A-AF7F-6792A6D864BA}"/>
+                <a16:creationId xmlns:a16="http://schemas.microsoft.com/office/drawing/2014/main" id="{3B669F5F-C4F5-44AD-A67B-277A1101995A}"/>
               </a:ext>
             </a:extLst>
           </p:cNvPr>
@@ -7804,7 +7804,7 @@
           <p:cNvPr id="2" name="">
             <a:extLst xmlns:a="http://schemas.openxmlformats.org/drawingml/2006/main">
               <a:ext uri="{FF2B5EF4-FFF2-40B4-BE49-F238E27FC236}">
-                <a16:creationId xmlns:a16="http://schemas.microsoft.com/office/drawing/2014/main" id="{E08CD78F-F6B0-429A-8BC7-9F31DCFF99AA}"/>
+                <a16:creationId xmlns:a16="http://schemas.microsoft.com/office/drawing/2014/main" id="{CECD7AE5-3234-4579-9154-0DDBDCDEBBA9}"/>
               </a:ext>
             </a:extLst>
           </p:cNvPr>
@@ -7861,7 +7861,7 @@
           <p:cNvPr id="3" name="">
             <a:extLst xmlns:a="http://schemas.openxmlformats.org/drawingml/2006/main">
               <a:ext uri="{FF2B5EF4-FFF2-40B4-BE49-F238E27FC236}">
-                <a16:creationId xmlns:a16="http://schemas.microsoft.com/office/drawing/2014/main" id="{800605BF-E56A-4C63-9FDE-BF0B5917DF63}"/>
+                <a16:creationId xmlns:a16="http://schemas.microsoft.com/office/drawing/2014/main" id="{44D153FD-72DD-40EA-8AE5-92CF5BAC3398}"/>
               </a:ext>
             </a:extLst>
           </p:cNvPr>
@@ -7893,7 +7893,7 @@
           <p:cNvPr id="4" name="">
             <a:extLst xmlns:a="http://schemas.openxmlformats.org/drawingml/2006/main">
               <a:ext uri="{FF2B5EF4-FFF2-40B4-BE49-F238E27FC236}">
-                <a16:creationId xmlns:a16="http://schemas.microsoft.com/office/drawing/2014/main" id="{1A0128C9-491A-446C-9791-BF8829A5D365}"/>
+                <a16:creationId xmlns:a16="http://schemas.microsoft.com/office/drawing/2014/main" id="{E6889096-2C3A-4416-A730-14C548533628}"/>
               </a:ext>
             </a:extLst>
           </p:cNvPr>
@@ -7950,7 +7950,7 @@
           <p:cNvPr id="5" name="">
             <a:extLst xmlns:a="http://schemas.openxmlformats.org/drawingml/2006/main">
               <a:ext uri="{FF2B5EF4-FFF2-40B4-BE49-F238E27FC236}">
-                <a16:creationId xmlns:a16="http://schemas.microsoft.com/office/drawing/2014/main" id="{1ACD4E85-280B-4DA5-AC8E-110A52DB9F66}"/>
+                <a16:creationId xmlns:a16="http://schemas.microsoft.com/office/drawing/2014/main" id="{FB2724DC-F13A-4671-A753-23782C3DADE8}"/>
               </a:ext>
             </a:extLst>
           </p:cNvPr>
@@ -8007,7 +8007,7 @@
           <p:cNvPr id="6" name="">
             <a:extLst xmlns:a="http://schemas.openxmlformats.org/drawingml/2006/main">
               <a:ext uri="{FF2B5EF4-FFF2-40B4-BE49-F238E27FC236}">
-                <a16:creationId xmlns:a16="http://schemas.microsoft.com/office/drawing/2014/main" id="{CE7CC79F-9642-4BDA-9BB3-3AD64C52D612}"/>
+                <a16:creationId xmlns:a16="http://schemas.microsoft.com/office/drawing/2014/main" id="{2417F1F2-796B-4F0F-A507-2416E10E154C}"/>
               </a:ext>
             </a:extLst>
           </p:cNvPr>
@@ -8064,7 +8064,7 @@
           <p:cNvPr id="7" name="">
             <a:extLst xmlns:a="http://schemas.openxmlformats.org/drawingml/2006/main">
               <a:ext uri="{FF2B5EF4-FFF2-40B4-BE49-F238E27FC236}">
-                <a16:creationId xmlns:a16="http://schemas.microsoft.com/office/drawing/2014/main" id="{144542A6-6C3A-4222-83B3-324972F6C50C}"/>
+                <a16:creationId xmlns:a16="http://schemas.microsoft.com/office/drawing/2014/main" id="{E0D2F5E6-4B82-455D-8020-84E4EBE03682}"/>
               </a:ext>
             </a:extLst>
           </p:cNvPr>
@@ -8096,7 +8096,7 @@
           <p:cNvPr id="8" name="">
             <a:extLst xmlns:a="http://schemas.openxmlformats.org/drawingml/2006/main">
               <a:ext uri="{FF2B5EF4-FFF2-40B4-BE49-F238E27FC236}">
-                <a16:creationId xmlns:a16="http://schemas.microsoft.com/office/drawing/2014/main" id="{21BE2EA6-10CE-4417-BD31-E2277C67D479}"/>
+                <a16:creationId xmlns:a16="http://schemas.microsoft.com/office/drawing/2014/main" id="{F209DB36-15E3-42FC-8521-C25FB2BB7908}"/>
               </a:ext>
             </a:extLst>
           </p:cNvPr>
@@ -8153,7 +8153,7 @@
           <p:cNvPr id="9" name="">
             <a:extLst xmlns:a="http://schemas.openxmlformats.org/drawingml/2006/main">
               <a:ext uri="{FF2B5EF4-FFF2-40B4-BE49-F238E27FC236}">
-                <a16:creationId xmlns:a16="http://schemas.microsoft.com/office/drawing/2014/main" id="{179BC20B-5CCE-4ED6-BA07-9AC4C8951EA7}"/>
+                <a16:creationId xmlns:a16="http://schemas.microsoft.com/office/drawing/2014/main" id="{AFBF8A69-E57E-4FCF-9B52-CA03AB336270}"/>
               </a:ext>
             </a:extLst>
           </p:cNvPr>
@@ -8210,19 +8210,19 @@
           <p:cNvPr id="10" name="">
             <a:extLst xmlns:a="http://schemas.openxmlformats.org/drawingml/2006/main">
               <a:ext uri="{FF2B5EF4-FFF2-40B4-BE49-F238E27FC236}">
-                <a16:creationId xmlns:a16="http://schemas.microsoft.com/office/drawing/2014/main" id="{64AF83D0-63E6-4A7B-BD6E-289318DA3AB2}"/>
-              </a:ext>
-            </a:extLst>
-          </p:cNvPr>
-          <p:cNvSpPr>
-            <a:spLocks xmlns:a="http://schemas.openxmlformats.org/drawingml/2006/main" noGrp="1"/>
-          </p:cNvSpPr>
-          <p:nvPr/>
-        </p:nvSpPr>
-        <p:spPr>
-          <a:xfrm xmlns:a="http://schemas.openxmlformats.org/drawingml/2006/main">
-            <a:off x="914400" y="1257300"/>
-            <a:ext cx="10363200" cy="781050"/>
+                <a16:creationId xmlns:a16="http://schemas.microsoft.com/office/drawing/2014/main" id="{C6055C4D-3019-4CA8-A186-2ADF5ACE9631}"/>
+              </a:ext>
+            </a:extLst>
+          </p:cNvPr>
+          <p:cNvSpPr>
+            <a:spLocks xmlns:a="http://schemas.openxmlformats.org/drawingml/2006/main" noGrp="1"/>
+          </p:cNvSpPr>
+          <p:nvPr/>
+        </p:nvSpPr>
+        <p:spPr>
+          <a:xfrm xmlns:a="http://schemas.openxmlformats.org/drawingml/2006/main">
+            <a:off x="857250" y="1219200"/>
+            <a:ext cx="10477500" cy="742950"/>
           </a:xfrm>
           <a:prstGeom xmlns:a="http://schemas.openxmlformats.org/drawingml/2006/main" prst="rect">
             <a:avLst/>
@@ -8239,7 +8239,7 @@
           <a:lstStyle xmlns:a="http://schemas.openxmlformats.org/drawingml/2006/main"/>
           <a:p xmlns:a="http://schemas.openxmlformats.org/drawingml/2006/main">
             <a:pPr algn="ctr">
-              <a:defRPr sz="2175" b="1">
+              <a:defRPr sz="2100" b="1">
                 <a:solidFill>
                   <a:srgbClr val="17253A"/>
                 </a:solidFill>
@@ -8249,7 +8249,7 @@
               </a:defRPr>
             </a:pPr>
             <a:r>
-              <a:rPr sz="2175" b="1">
+              <a:rPr sz="2100" b="1">
                 <a:solidFill>
                   <a:srgbClr val="17253A"/>
                 </a:solidFill>
@@ -8267,28 +8267,30 @@
           <p:cNvPr id="11" name="">
             <a:extLst xmlns:a="http://schemas.openxmlformats.org/drawingml/2006/main">
               <a:ext uri="{FF2B5EF4-FFF2-40B4-BE49-F238E27FC236}">
-                <a16:creationId xmlns:a16="http://schemas.microsoft.com/office/drawing/2014/main" id="{A12D021C-2C27-4320-8CB7-A0FBCDBCE1CA}"/>
-              </a:ext>
-            </a:extLst>
-          </p:cNvPr>
-          <p:cNvSpPr>
-            <a:spLocks xmlns:a="http://schemas.openxmlformats.org/drawingml/2006/main" noGrp="1"/>
-          </p:cNvSpPr>
-          <p:nvPr/>
-        </p:nvSpPr>
-        <p:spPr>
-          <a:xfrm xmlns:a="http://schemas.openxmlformats.org/drawingml/2006/main">
-            <a:off x="1000125" y="2247900"/>
-            <a:ext cx="476250" cy="476250"/>
-          </a:xfrm>
-          <a:prstGeom xmlns:a="http://schemas.openxmlformats.org/drawingml/2006/main" prst="ellipse">
+                <a16:creationId xmlns:a16="http://schemas.microsoft.com/office/drawing/2014/main" id="{F11619DF-0CF3-48E5-9991-53105E54599D}"/>
+              </a:ext>
+            </a:extLst>
+          </p:cNvPr>
+          <p:cNvSpPr>
+            <a:spLocks xmlns:a="http://schemas.openxmlformats.org/drawingml/2006/main" noGrp="1"/>
+          </p:cNvSpPr>
+          <p:nvPr/>
+        </p:nvSpPr>
+        <p:spPr>
+          <a:xfrm xmlns:a="http://schemas.openxmlformats.org/drawingml/2006/main">
+            <a:off x="971550" y="2124075"/>
+            <a:ext cx="38100" cy="3524250"/>
+          </a:xfrm>
+          <a:prstGeom xmlns:a="http://schemas.openxmlformats.org/drawingml/2006/main" prst="rect">
             <a:avLst/>
           </a:prstGeom>
           <a:solidFill xmlns:a="http://schemas.openxmlformats.org/drawingml/2006/main">
-            <a:srgbClr val="18324A"/>
+            <a:srgbClr val="2C6E73"/>
           </a:solidFill>
           <a:ln xmlns:a="http://schemas.openxmlformats.org/drawingml/2006/main" w="0">
-            <a:noFill/>
+            <a:solidFill>
+              <a:srgbClr val="2C6E73"/>
+            </a:solidFill>
           </a:ln>
         </p:spPr>
       </p:sp>
@@ -8297,19 +8299,19 @@
           <p:cNvPr id="12" name="">
             <a:extLst xmlns:a="http://schemas.openxmlformats.org/drawingml/2006/main">
               <a:ext uri="{FF2B5EF4-FFF2-40B4-BE49-F238E27FC236}">
-                <a16:creationId xmlns:a16="http://schemas.microsoft.com/office/drawing/2014/main" id="{5E94DFDB-B1C8-418A-AF8A-C39EAB131D27}"/>
-              </a:ext>
-            </a:extLst>
-          </p:cNvPr>
-          <p:cNvSpPr>
-            <a:spLocks xmlns:a="http://schemas.openxmlformats.org/drawingml/2006/main" noGrp="1"/>
-          </p:cNvSpPr>
-          <p:nvPr/>
-        </p:nvSpPr>
-        <p:spPr>
-          <a:xfrm xmlns:a="http://schemas.openxmlformats.org/drawingml/2006/main">
-            <a:off x="1000125" y="2276475"/>
-            <a:ext cx="476250" cy="419100"/>
+                <a16:creationId xmlns:a16="http://schemas.microsoft.com/office/drawing/2014/main" id="{2AF6B600-2F02-4E0F-B6AA-EDAEFD4A29B8}"/>
+              </a:ext>
+            </a:extLst>
+          </p:cNvPr>
+          <p:cNvSpPr>
+            <a:spLocks xmlns:a="http://schemas.openxmlformats.org/drawingml/2006/main" noGrp="1"/>
+          </p:cNvSpPr>
+          <p:nvPr/>
+        </p:nvSpPr>
+        <p:spPr>
+          <a:xfrm xmlns:a="http://schemas.openxmlformats.org/drawingml/2006/main">
+            <a:off x="1162050" y="2200275"/>
+            <a:ext cx="400050" cy="400050"/>
           </a:xfrm>
           <a:prstGeom xmlns:a="http://schemas.openxmlformats.org/drawingml/2006/main" prst="rect">
             <a:avLst/>
@@ -8326,9 +8328,9 @@
           <a:lstStyle xmlns:a="http://schemas.openxmlformats.org/drawingml/2006/main"/>
           <a:p xmlns:a="http://schemas.openxmlformats.org/drawingml/2006/main">
             <a:pPr algn="ctr">
-              <a:defRPr sz="1350" b="1">
-                <a:solidFill>
-                  <a:srgbClr val="FFFFFF"/>
+              <a:defRPr sz="1125" b="1">
+                <a:solidFill>
+                  <a:srgbClr val="2C6E73"/>
                 </a:solidFill>
                 <a:latin typeface="Arial"/>
                 <a:ea typeface="Arial"/>
@@ -8336,9 +8338,9 @@
               </a:defRPr>
             </a:pPr>
             <a:r>
-              <a:rPr sz="1350" b="1">
-                <a:solidFill>
-                  <a:srgbClr val="FFFFFF"/>
+              <a:rPr sz="1125" b="1">
+                <a:solidFill>
+                  <a:srgbClr val="2C6E73"/>
                 </a:solidFill>
                 <a:latin typeface="Arial"/>
                 <a:ea typeface="Arial"/>
@@ -8354,19 +8356,19 @@
           <p:cNvPr id="13" name="">
             <a:extLst xmlns:a="http://schemas.openxmlformats.org/drawingml/2006/main">
               <a:ext uri="{FF2B5EF4-FFF2-40B4-BE49-F238E27FC236}">
-                <a16:creationId xmlns:a16="http://schemas.microsoft.com/office/drawing/2014/main" id="{E5E8EE80-DFAF-47B1-9820-68563030B658}"/>
-              </a:ext>
-            </a:extLst>
-          </p:cNvPr>
-          <p:cNvSpPr>
-            <a:spLocks xmlns:a="http://schemas.openxmlformats.org/drawingml/2006/main" noGrp="1"/>
-          </p:cNvSpPr>
-          <p:nvPr/>
-        </p:nvSpPr>
-        <p:spPr>
-          <a:xfrm xmlns:a="http://schemas.openxmlformats.org/drawingml/2006/main">
-            <a:off x="1714500" y="2181225"/>
-            <a:ext cx="9429750" cy="609600"/>
+                <a16:creationId xmlns:a16="http://schemas.microsoft.com/office/drawing/2014/main" id="{69197019-B855-45C6-924C-061A360E2B2E}"/>
+              </a:ext>
+            </a:extLst>
+          </p:cNvPr>
+          <p:cNvSpPr>
+            <a:spLocks xmlns:a="http://schemas.openxmlformats.org/drawingml/2006/main" noGrp="1"/>
+          </p:cNvSpPr>
+          <p:nvPr/>
+        </p:nvSpPr>
+        <p:spPr>
+          <a:xfrm xmlns:a="http://schemas.openxmlformats.org/drawingml/2006/main">
+            <a:off x="1714500" y="2114550"/>
+            <a:ext cx="9525000" cy="809625"/>
           </a:xfrm>
           <a:prstGeom xmlns:a="http://schemas.openxmlformats.org/drawingml/2006/main" prst="rect">
             <a:avLst/>
@@ -8383,7 +8385,7 @@
           <a:lstStyle xmlns:a="http://schemas.openxmlformats.org/drawingml/2006/main"/>
           <a:p xmlns:a="http://schemas.openxmlformats.org/drawingml/2006/main">
             <a:pPr algn="l">
-              <a:defRPr sz="1500" b="0">
+              <a:defRPr sz="1725" b="0">
                 <a:solidFill>
                   <a:srgbClr val="17253A"/>
                 </a:solidFill>
@@ -8393,7 +8395,7 @@
               </a:defRPr>
             </a:pPr>
             <a:r>
-              <a:rPr sz="1500" b="0">
+              <a:rPr sz="1725" b="0">
                 <a:solidFill>
                   <a:srgbClr val="17253A"/>
                 </a:solidFill>
@@ -8401,7 +8403,7 @@
                 <a:ea typeface="Arial"/>
                 <a:cs typeface="Arial"/>
               </a:rPr>
-              <a:t>Identify the structure: Write the conversion fact and identify whether the unit becomes larger or smaller.</a:t>
+              <a:t>2.65 kg × 1,000 = 2,650 g</a:t>
             </a:r>
           </a:p>
         </p:txBody>
@@ -8411,28 +8413,30 @@
           <p:cNvPr id="14" name="">
             <a:extLst xmlns:a="http://schemas.openxmlformats.org/drawingml/2006/main">
               <a:ext uri="{FF2B5EF4-FFF2-40B4-BE49-F238E27FC236}">
-                <a16:creationId xmlns:a16="http://schemas.microsoft.com/office/drawing/2014/main" id="{7F410C64-8443-47A9-A8C0-8D549F873B4F}"/>
-              </a:ext>
-            </a:extLst>
-          </p:cNvPr>
-          <p:cNvSpPr>
-            <a:spLocks xmlns:a="http://schemas.openxmlformats.org/drawingml/2006/main" noGrp="1"/>
-          </p:cNvSpPr>
-          <p:nvPr/>
-        </p:nvSpPr>
-        <p:spPr>
-          <a:xfrm xmlns:a="http://schemas.openxmlformats.org/drawingml/2006/main">
-            <a:off x="1000125" y="2990850"/>
-            <a:ext cx="476250" cy="476250"/>
-          </a:xfrm>
-          <a:prstGeom xmlns:a="http://schemas.openxmlformats.org/drawingml/2006/main" prst="ellipse">
+                <a16:creationId xmlns:a16="http://schemas.microsoft.com/office/drawing/2014/main" id="{CA96A754-F8EA-4302-81A5-1688DF442554}"/>
+              </a:ext>
+            </a:extLst>
+          </p:cNvPr>
+          <p:cNvSpPr>
+            <a:spLocks xmlns:a="http://schemas.openxmlformats.org/drawingml/2006/main" noGrp="1"/>
+          </p:cNvSpPr>
+          <p:nvPr/>
+        </p:nvSpPr>
+        <p:spPr>
+          <a:xfrm xmlns:a="http://schemas.openxmlformats.org/drawingml/2006/main">
+            <a:off x="1714500" y="2943225"/>
+            <a:ext cx="9334500" cy="9525"/>
+          </a:xfrm>
+          <a:prstGeom xmlns:a="http://schemas.openxmlformats.org/drawingml/2006/main" prst="rect">
             <a:avLst/>
           </a:prstGeom>
           <a:solidFill xmlns:a="http://schemas.openxmlformats.org/drawingml/2006/main">
-            <a:srgbClr val="2C6E73"/>
+            <a:srgbClr val="D9E0E6"/>
           </a:solidFill>
           <a:ln xmlns:a="http://schemas.openxmlformats.org/drawingml/2006/main" w="0">
-            <a:noFill/>
+            <a:solidFill>
+              <a:srgbClr val="D9E0E6"/>
+            </a:solidFill>
           </a:ln>
         </p:spPr>
       </p:sp>
@@ -8441,19 +8445,19 @@
           <p:cNvPr id="15" name="">
             <a:extLst xmlns:a="http://schemas.openxmlformats.org/drawingml/2006/main">
               <a:ext uri="{FF2B5EF4-FFF2-40B4-BE49-F238E27FC236}">
-                <a16:creationId xmlns:a16="http://schemas.microsoft.com/office/drawing/2014/main" id="{69E93A85-AD5C-4F5A-9D9A-9AE5E00EB4B2}"/>
-              </a:ext>
-            </a:extLst>
-          </p:cNvPr>
-          <p:cNvSpPr>
-            <a:spLocks xmlns:a="http://schemas.openxmlformats.org/drawingml/2006/main" noGrp="1"/>
-          </p:cNvSpPr>
-          <p:nvPr/>
-        </p:nvSpPr>
-        <p:spPr>
-          <a:xfrm xmlns:a="http://schemas.openxmlformats.org/drawingml/2006/main">
-            <a:off x="1000125" y="3019425"/>
-            <a:ext cx="476250" cy="419100"/>
+                <a16:creationId xmlns:a16="http://schemas.microsoft.com/office/drawing/2014/main" id="{19FFC8CB-D14D-427B-BFE2-C9B0BAD36BBE}"/>
+              </a:ext>
+            </a:extLst>
+          </p:cNvPr>
+          <p:cNvSpPr>
+            <a:spLocks xmlns:a="http://schemas.openxmlformats.org/drawingml/2006/main" noGrp="1"/>
+          </p:cNvSpPr>
+          <p:nvPr/>
+        </p:nvSpPr>
+        <p:spPr>
+          <a:xfrm xmlns:a="http://schemas.openxmlformats.org/drawingml/2006/main">
+            <a:off x="1162050" y="3076575"/>
+            <a:ext cx="400050" cy="400050"/>
           </a:xfrm>
           <a:prstGeom xmlns:a="http://schemas.openxmlformats.org/drawingml/2006/main" prst="rect">
             <a:avLst/>
@@ -8470,9 +8474,9 @@
           <a:lstStyle xmlns:a="http://schemas.openxmlformats.org/drawingml/2006/main"/>
           <a:p xmlns:a="http://schemas.openxmlformats.org/drawingml/2006/main">
             <a:pPr algn="ctr">
-              <a:defRPr sz="1350" b="1">
-                <a:solidFill>
-                  <a:srgbClr val="FFFFFF"/>
+              <a:defRPr sz="1125" b="1">
+                <a:solidFill>
+                  <a:srgbClr val="2C6E73"/>
                 </a:solidFill>
                 <a:latin typeface="Arial"/>
                 <a:ea typeface="Arial"/>
@@ -8480,9 +8484,9 @@
               </a:defRPr>
             </a:pPr>
             <a:r>
-              <a:rPr sz="1350" b="1">
-                <a:solidFill>
-                  <a:srgbClr val="FFFFFF"/>
+              <a:rPr sz="1125" b="1">
+                <a:solidFill>
+                  <a:srgbClr val="2C6E73"/>
                 </a:solidFill>
                 <a:latin typeface="Arial"/>
                 <a:ea typeface="Arial"/>
@@ -8498,19 +8502,19 @@
           <p:cNvPr id="16" name="">
             <a:extLst xmlns:a="http://schemas.openxmlformats.org/drawingml/2006/main">
               <a:ext uri="{FF2B5EF4-FFF2-40B4-BE49-F238E27FC236}">
-                <a16:creationId xmlns:a16="http://schemas.microsoft.com/office/drawing/2014/main" id="{34F75ADA-3413-4FA8-8FAD-A713FB124618}"/>
-              </a:ext>
-            </a:extLst>
-          </p:cNvPr>
-          <p:cNvSpPr>
-            <a:spLocks xmlns:a="http://schemas.openxmlformats.org/drawingml/2006/main" noGrp="1"/>
-          </p:cNvSpPr>
-          <p:nvPr/>
-        </p:nvSpPr>
-        <p:spPr>
-          <a:xfrm xmlns:a="http://schemas.openxmlformats.org/drawingml/2006/main">
-            <a:off x="1714500" y="2924175"/>
-            <a:ext cx="9429750" cy="609600"/>
+                <a16:creationId xmlns:a16="http://schemas.microsoft.com/office/drawing/2014/main" id="{9BDC6DC6-42B6-4817-BD50-1B3A54E955AE}"/>
+              </a:ext>
+            </a:extLst>
+          </p:cNvPr>
+          <p:cNvSpPr>
+            <a:spLocks xmlns:a="http://schemas.openxmlformats.org/drawingml/2006/main" noGrp="1"/>
+          </p:cNvSpPr>
+          <p:nvPr/>
+        </p:nvSpPr>
+        <p:spPr>
+          <a:xfrm xmlns:a="http://schemas.openxmlformats.org/drawingml/2006/main">
+            <a:off x="1714500" y="2990850"/>
+            <a:ext cx="9525000" cy="809625"/>
           </a:xfrm>
           <a:prstGeom xmlns:a="http://schemas.openxmlformats.org/drawingml/2006/main" prst="rect">
             <a:avLst/>
@@ -8527,7 +8531,7 @@
           <a:lstStyle xmlns:a="http://schemas.openxmlformats.org/drawingml/2006/main"/>
           <a:p xmlns:a="http://schemas.openxmlformats.org/drawingml/2006/main">
             <a:pPr algn="l">
-              <a:defRPr sz="1500" b="0">
+              <a:defRPr sz="1725" b="0">
                 <a:solidFill>
                   <a:srgbClr val="17253A"/>
                 </a:solidFill>
@@ -8537,7 +8541,7 @@
               </a:defRPr>
             </a:pPr>
             <a:r>
-              <a:rPr sz="1500" b="0">
+              <a:rPr sz="1725" b="0">
                 <a:solidFill>
                   <a:srgbClr val="17253A"/>
                 </a:solidFill>
@@ -8545,7 +8549,7 @@
                 <a:ea typeface="Arial"/>
                 <a:cs typeface="Arial"/>
               </a:rPr>
-              <a:t>Set up the method: Multiply or divide by the correct scale factor.</a:t>
+              <a:t>3,750 ml ÷ 1,000</a:t>
             </a:r>
           </a:p>
         </p:txBody>
@@ -8555,28 +8559,30 @@
           <p:cNvPr id="17" name="">
             <a:extLst xmlns:a="http://schemas.openxmlformats.org/drawingml/2006/main">
               <a:ext uri="{FF2B5EF4-FFF2-40B4-BE49-F238E27FC236}">
-                <a16:creationId xmlns:a16="http://schemas.microsoft.com/office/drawing/2014/main" id="{99EAE1EB-F2E7-4CA8-AB42-3C4382CF68F0}"/>
-              </a:ext>
-            </a:extLst>
-          </p:cNvPr>
-          <p:cNvSpPr>
-            <a:spLocks xmlns:a="http://schemas.openxmlformats.org/drawingml/2006/main" noGrp="1"/>
-          </p:cNvSpPr>
-          <p:nvPr/>
-        </p:nvSpPr>
-        <p:spPr>
-          <a:xfrm xmlns:a="http://schemas.openxmlformats.org/drawingml/2006/main">
-            <a:off x="1000125" y="3733800"/>
-            <a:ext cx="476250" cy="476250"/>
-          </a:xfrm>
-          <a:prstGeom xmlns:a="http://schemas.openxmlformats.org/drawingml/2006/main" prst="ellipse">
+                <a16:creationId xmlns:a16="http://schemas.microsoft.com/office/drawing/2014/main" id="{4332322D-F3D9-405A-AD94-EE26B88FF4DC}"/>
+              </a:ext>
+            </a:extLst>
+          </p:cNvPr>
+          <p:cNvSpPr>
+            <a:spLocks xmlns:a="http://schemas.openxmlformats.org/drawingml/2006/main" noGrp="1"/>
+          </p:cNvSpPr>
+          <p:nvPr/>
+        </p:nvSpPr>
+        <p:spPr>
+          <a:xfrm xmlns:a="http://schemas.openxmlformats.org/drawingml/2006/main">
+            <a:off x="1714500" y="3819525"/>
+            <a:ext cx="9334500" cy="9525"/>
+          </a:xfrm>
+          <a:prstGeom xmlns:a="http://schemas.openxmlformats.org/drawingml/2006/main" prst="rect">
             <a:avLst/>
           </a:prstGeom>
           <a:solidFill xmlns:a="http://schemas.openxmlformats.org/drawingml/2006/main">
-            <a:srgbClr val="2C6E73"/>
+            <a:srgbClr val="D9E0E6"/>
           </a:solidFill>
           <a:ln xmlns:a="http://schemas.openxmlformats.org/drawingml/2006/main" w="0">
-            <a:noFill/>
+            <a:solidFill>
+              <a:srgbClr val="D9E0E6"/>
+            </a:solidFill>
           </a:ln>
         </p:spPr>
       </p:sp>
@@ -8585,19 +8591,19 @@
           <p:cNvPr id="18" name="">
             <a:extLst xmlns:a="http://schemas.openxmlformats.org/drawingml/2006/main">
               <a:ext uri="{FF2B5EF4-FFF2-40B4-BE49-F238E27FC236}">
-                <a16:creationId xmlns:a16="http://schemas.microsoft.com/office/drawing/2014/main" id="{160545E1-CEE3-496F-9927-747ED79AAF70}"/>
-              </a:ext>
-            </a:extLst>
-          </p:cNvPr>
-          <p:cNvSpPr>
-            <a:spLocks xmlns:a="http://schemas.openxmlformats.org/drawingml/2006/main" noGrp="1"/>
-          </p:cNvSpPr>
-          <p:nvPr/>
-        </p:nvSpPr>
-        <p:spPr>
-          <a:xfrm xmlns:a="http://schemas.openxmlformats.org/drawingml/2006/main">
-            <a:off x="1000125" y="3762375"/>
-            <a:ext cx="476250" cy="419100"/>
+                <a16:creationId xmlns:a16="http://schemas.microsoft.com/office/drawing/2014/main" id="{3E640706-7968-4D2B-B14F-0E76075EDB95}"/>
+              </a:ext>
+            </a:extLst>
+          </p:cNvPr>
+          <p:cNvSpPr>
+            <a:spLocks xmlns:a="http://schemas.openxmlformats.org/drawingml/2006/main" noGrp="1"/>
+          </p:cNvSpPr>
+          <p:nvPr/>
+        </p:nvSpPr>
+        <p:spPr>
+          <a:xfrm xmlns:a="http://schemas.openxmlformats.org/drawingml/2006/main">
+            <a:off x="1162050" y="3952875"/>
+            <a:ext cx="400050" cy="400050"/>
           </a:xfrm>
           <a:prstGeom xmlns:a="http://schemas.openxmlformats.org/drawingml/2006/main" prst="rect">
             <a:avLst/>
@@ -8614,9 +8620,9 @@
           <a:lstStyle xmlns:a="http://schemas.openxmlformats.org/drawingml/2006/main"/>
           <a:p xmlns:a="http://schemas.openxmlformats.org/drawingml/2006/main">
             <a:pPr algn="ctr">
-              <a:defRPr sz="1350" b="1">
-                <a:solidFill>
-                  <a:srgbClr val="FFFFFF"/>
+              <a:defRPr sz="1125" b="1">
+                <a:solidFill>
+                  <a:srgbClr val="2C6E73"/>
                 </a:solidFill>
                 <a:latin typeface="Arial"/>
                 <a:ea typeface="Arial"/>
@@ -8624,9 +8630,9 @@
               </a:defRPr>
             </a:pPr>
             <a:r>
-              <a:rPr sz="1350" b="1">
-                <a:solidFill>
-                  <a:srgbClr val="FFFFFF"/>
+              <a:rPr sz="1125" b="1">
+                <a:solidFill>
+                  <a:srgbClr val="2C6E73"/>
                 </a:solidFill>
                 <a:latin typeface="Arial"/>
                 <a:ea typeface="Arial"/>
@@ -8642,19 +8648,19 @@
           <p:cNvPr id="19" name="">
             <a:extLst xmlns:a="http://schemas.openxmlformats.org/drawingml/2006/main">
               <a:ext uri="{FF2B5EF4-FFF2-40B4-BE49-F238E27FC236}">
-                <a16:creationId xmlns:a16="http://schemas.microsoft.com/office/drawing/2014/main" id="{6539F9F9-FEE1-482C-AF60-67A730CDEA7B}"/>
-              </a:ext>
-            </a:extLst>
-          </p:cNvPr>
-          <p:cNvSpPr>
-            <a:spLocks xmlns:a="http://schemas.openxmlformats.org/drawingml/2006/main" noGrp="1"/>
-          </p:cNvSpPr>
-          <p:nvPr/>
-        </p:nvSpPr>
-        <p:spPr>
-          <a:xfrm xmlns:a="http://schemas.openxmlformats.org/drawingml/2006/main">
-            <a:off x="1714500" y="3667125"/>
-            <a:ext cx="9429750" cy="609600"/>
+                <a16:creationId xmlns:a16="http://schemas.microsoft.com/office/drawing/2014/main" id="{20FBEA63-140A-4F47-83DB-B0730379F360}"/>
+              </a:ext>
+            </a:extLst>
+          </p:cNvPr>
+          <p:cNvSpPr>
+            <a:spLocks xmlns:a="http://schemas.openxmlformats.org/drawingml/2006/main" noGrp="1"/>
+          </p:cNvSpPr>
+          <p:nvPr/>
+        </p:nvSpPr>
+        <p:spPr>
+          <a:xfrm xmlns:a="http://schemas.openxmlformats.org/drawingml/2006/main">
+            <a:off x="1714500" y="3867150"/>
+            <a:ext cx="9525000" cy="809625"/>
           </a:xfrm>
           <a:prstGeom xmlns:a="http://schemas.openxmlformats.org/drawingml/2006/main" prst="rect">
             <a:avLst/>
@@ -8671,7 +8677,7 @@
           <a:lstStyle xmlns:a="http://schemas.openxmlformats.org/drawingml/2006/main"/>
           <a:p xmlns:a="http://schemas.openxmlformats.org/drawingml/2006/main">
             <a:pPr algn="l">
-              <a:defRPr sz="1500" b="0">
+              <a:defRPr sz="1725" b="0">
                 <a:solidFill>
                   <a:srgbClr val="17253A"/>
                 </a:solidFill>
@@ -8681,7 +8687,7 @@
               </a:defRPr>
             </a:pPr>
             <a:r>
-              <a:rPr sz="1500" b="0">
+              <a:rPr sz="1725" b="0">
                 <a:solidFill>
                   <a:srgbClr val="17253A"/>
                 </a:solidFill>
@@ -8689,7 +8695,7 @@
                 <a:ea typeface="Arial"/>
                 <a:cs typeface="Arial"/>
               </a:rPr>
-              <a:t>Complete the calculation: 2,650 g and 3.75 litres.</a:t>
+              <a:t>3,750 ml = 3.75 litres</a:t>
             </a:r>
           </a:p>
         </p:txBody>
@@ -8699,28 +8705,30 @@
           <p:cNvPr id="20" name="">
             <a:extLst xmlns:a="http://schemas.openxmlformats.org/drawingml/2006/main">
               <a:ext uri="{FF2B5EF4-FFF2-40B4-BE49-F238E27FC236}">
-                <a16:creationId xmlns:a16="http://schemas.microsoft.com/office/drawing/2014/main" id="{2194A98C-90DB-464E-9D52-846101ED0E63}"/>
-              </a:ext>
-            </a:extLst>
-          </p:cNvPr>
-          <p:cNvSpPr>
-            <a:spLocks xmlns:a="http://schemas.openxmlformats.org/drawingml/2006/main" noGrp="1"/>
-          </p:cNvSpPr>
-          <p:nvPr/>
-        </p:nvSpPr>
-        <p:spPr>
-          <a:xfrm xmlns:a="http://schemas.openxmlformats.org/drawingml/2006/main">
-            <a:off x="1000125" y="4476750"/>
-            <a:ext cx="476250" cy="476250"/>
-          </a:xfrm>
-          <a:prstGeom xmlns:a="http://schemas.openxmlformats.org/drawingml/2006/main" prst="ellipse">
+                <a16:creationId xmlns:a16="http://schemas.microsoft.com/office/drawing/2014/main" id="{8551881C-D84A-4045-ABBB-D73333D67407}"/>
+              </a:ext>
+            </a:extLst>
+          </p:cNvPr>
+          <p:cNvSpPr>
+            <a:spLocks xmlns:a="http://schemas.openxmlformats.org/drawingml/2006/main" noGrp="1"/>
+          </p:cNvSpPr>
+          <p:nvPr/>
+        </p:nvSpPr>
+        <p:spPr>
+          <a:xfrm xmlns:a="http://schemas.openxmlformats.org/drawingml/2006/main">
+            <a:off x="1714500" y="4695825"/>
+            <a:ext cx="9334500" cy="9525"/>
+          </a:xfrm>
+          <a:prstGeom xmlns:a="http://schemas.openxmlformats.org/drawingml/2006/main" prst="rect">
             <a:avLst/>
           </a:prstGeom>
           <a:solidFill xmlns:a="http://schemas.openxmlformats.org/drawingml/2006/main">
-            <a:srgbClr val="2C6E73"/>
+            <a:srgbClr val="D9E0E6"/>
           </a:solidFill>
           <a:ln xmlns:a="http://schemas.openxmlformats.org/drawingml/2006/main" w="0">
-            <a:noFill/>
+            <a:solidFill>
+              <a:srgbClr val="D9E0E6"/>
+            </a:solidFill>
           </a:ln>
         </p:spPr>
       </p:sp>
@@ -8729,19 +8737,19 @@
           <p:cNvPr id="21" name="">
             <a:extLst xmlns:a="http://schemas.openxmlformats.org/drawingml/2006/main">
               <a:ext uri="{FF2B5EF4-FFF2-40B4-BE49-F238E27FC236}">
-                <a16:creationId xmlns:a16="http://schemas.microsoft.com/office/drawing/2014/main" id="{FB413054-C43F-4E41-B9E7-15ADB742BE04}"/>
-              </a:ext>
-            </a:extLst>
-          </p:cNvPr>
-          <p:cNvSpPr>
-            <a:spLocks xmlns:a="http://schemas.openxmlformats.org/drawingml/2006/main" noGrp="1"/>
-          </p:cNvSpPr>
-          <p:nvPr/>
-        </p:nvSpPr>
-        <p:spPr>
-          <a:xfrm xmlns:a="http://schemas.openxmlformats.org/drawingml/2006/main">
-            <a:off x="1000125" y="4505325"/>
-            <a:ext cx="476250" cy="419100"/>
+                <a16:creationId xmlns:a16="http://schemas.microsoft.com/office/drawing/2014/main" id="{97A0FB57-95E5-4444-9840-38C13257442D}"/>
+              </a:ext>
+            </a:extLst>
+          </p:cNvPr>
+          <p:cNvSpPr>
+            <a:spLocks xmlns:a="http://schemas.openxmlformats.org/drawingml/2006/main" noGrp="1"/>
+          </p:cNvSpPr>
+          <p:nvPr/>
+        </p:nvSpPr>
+        <p:spPr>
+          <a:xfrm xmlns:a="http://schemas.openxmlformats.org/drawingml/2006/main">
+            <a:off x="1162050" y="4829175"/>
+            <a:ext cx="400050" cy="400050"/>
           </a:xfrm>
           <a:prstGeom xmlns:a="http://schemas.openxmlformats.org/drawingml/2006/main" prst="rect">
             <a:avLst/>
@@ -8758,9 +8766,9 @@
           <a:lstStyle xmlns:a="http://schemas.openxmlformats.org/drawingml/2006/main"/>
           <a:p xmlns:a="http://schemas.openxmlformats.org/drawingml/2006/main">
             <a:pPr algn="ctr">
-              <a:defRPr sz="1350" b="1">
-                <a:solidFill>
-                  <a:srgbClr val="FFFFFF"/>
+              <a:defRPr sz="1125" b="1">
+                <a:solidFill>
+                  <a:srgbClr val="2F785D"/>
                 </a:solidFill>
                 <a:latin typeface="Arial"/>
                 <a:ea typeface="Arial"/>
@@ -8768,9 +8776,9 @@
               </a:defRPr>
             </a:pPr>
             <a:r>
-              <a:rPr sz="1350" b="1">
-                <a:solidFill>
-                  <a:srgbClr val="FFFFFF"/>
+              <a:rPr sz="1125" b="1">
+                <a:solidFill>
+                  <a:srgbClr val="2F785D"/>
                 </a:solidFill>
                 <a:latin typeface="Arial"/>
                 <a:ea typeface="Arial"/>
@@ -8786,19 +8794,19 @@
           <p:cNvPr id="22" name="">
             <a:extLst xmlns:a="http://schemas.openxmlformats.org/drawingml/2006/main">
               <a:ext uri="{FF2B5EF4-FFF2-40B4-BE49-F238E27FC236}">
-                <a16:creationId xmlns:a16="http://schemas.microsoft.com/office/drawing/2014/main" id="{24A7EDEC-527A-46D8-8E07-F576F6533640}"/>
-              </a:ext>
-            </a:extLst>
-          </p:cNvPr>
-          <p:cNvSpPr>
-            <a:spLocks xmlns:a="http://schemas.openxmlformats.org/drawingml/2006/main" noGrp="1"/>
-          </p:cNvSpPr>
-          <p:nvPr/>
-        </p:nvSpPr>
-        <p:spPr>
-          <a:xfrm xmlns:a="http://schemas.openxmlformats.org/drawingml/2006/main">
-            <a:off x="1714500" y="4410075"/>
-            <a:ext cx="9429750" cy="609600"/>
+                <a16:creationId xmlns:a16="http://schemas.microsoft.com/office/drawing/2014/main" id="{AA358428-C3B1-4801-8C5D-D144C5F2110D}"/>
+              </a:ext>
+            </a:extLst>
+          </p:cNvPr>
+          <p:cNvSpPr>
+            <a:spLocks xmlns:a="http://schemas.openxmlformats.org/drawingml/2006/main" noGrp="1"/>
+          </p:cNvSpPr>
+          <p:nvPr/>
+        </p:nvSpPr>
+        <p:spPr>
+          <a:xfrm xmlns:a="http://schemas.openxmlformats.org/drawingml/2006/main">
+            <a:off x="1714500" y="4743450"/>
+            <a:ext cx="9525000" cy="809625"/>
           </a:xfrm>
           <a:prstGeom xmlns:a="http://schemas.openxmlformats.org/drawingml/2006/main" prst="rect">
             <a:avLst/>
@@ -8815,7 +8823,7 @@
           <a:lstStyle xmlns:a="http://schemas.openxmlformats.org/drawingml/2006/main"/>
           <a:p xmlns:a="http://schemas.openxmlformats.org/drawingml/2006/main">
             <a:pPr algn="l">
-              <a:defRPr sz="1500" b="1">
+              <a:defRPr sz="1725" b="1">
                 <a:solidFill>
                   <a:srgbClr val="2F785D"/>
                 </a:solidFill>
@@ -8825,7 +8833,7 @@
               </a:defRPr>
             </a:pPr>
             <a:r>
-              <a:rPr sz="1500" b="1">
+              <a:rPr sz="1725" b="1">
                 <a:solidFill>
                   <a:srgbClr val="2F785D"/>
                 </a:solidFill>
@@ -8833,7 +8841,7 @@
                 <a:ea typeface="Arial"/>
                 <a:cs typeface="Arial"/>
               </a:rPr>
-              <a:t>Check the result: Attach the unit and check the answer's size in context.</a:t>
+              <a:t>2,650 g and 3.75 litres</a:t>
             </a:r>
           </a:p>
         </p:txBody>
@@ -8841,7 +8849,7 @@
     </p:spTree>
     <p:extLst>
       <p:ext uri="{BB962C8B-B14F-4D97-AF65-F5344CB8AC3E}">
-        <p14:creationId xmlns:p14="http://schemas.microsoft.com/office/powerpoint/2010/main" val="228977527"/>
+        <p14:creationId xmlns:p14="http://schemas.microsoft.com/office/powerpoint/2010/main" val="2112053759"/>
       </p:ext>
     </p:extLst>
   </p:cSld>
@@ -9134,7 +9142,7 @@
           <p:cNvPr id="15" name="">
             <a:extLst xmlns:a="http://schemas.openxmlformats.org/drawingml/2006/main">
               <a:ext uri="{FF2B5EF4-FFF2-40B4-BE49-F238E27FC236}">
-                <a16:creationId xmlns:a16="http://schemas.microsoft.com/office/drawing/2014/main" id="{D717ED8E-7311-4CCF-9EBB-4A7C86B06715}"/>
+                <a16:creationId xmlns:a16="http://schemas.microsoft.com/office/drawing/2014/main" id="{3441C01D-D830-4CD4-BDAD-021C9555AA4B}"/>
               </a:ext>
             </a:extLst>
           </p:cNvPr>
@@ -9166,7 +9174,7 @@
           <p:cNvPr id="2" name="">
             <a:extLst xmlns:a="http://schemas.openxmlformats.org/drawingml/2006/main">
               <a:ext uri="{FF2B5EF4-FFF2-40B4-BE49-F238E27FC236}">
-                <a16:creationId xmlns:a16="http://schemas.microsoft.com/office/drawing/2014/main" id="{7F484B1F-1C55-416D-861C-0C8AFAC9E29D}"/>
+                <a16:creationId xmlns:a16="http://schemas.microsoft.com/office/drawing/2014/main" id="{426214C5-AC1A-4A64-9FFA-1F08FB0D8D46}"/>
               </a:ext>
             </a:extLst>
           </p:cNvPr>
@@ -9223,7 +9231,7 @@
           <p:cNvPr id="3" name="">
             <a:extLst xmlns:a="http://schemas.openxmlformats.org/drawingml/2006/main">
               <a:ext uri="{FF2B5EF4-FFF2-40B4-BE49-F238E27FC236}">
-                <a16:creationId xmlns:a16="http://schemas.microsoft.com/office/drawing/2014/main" id="{D7DDDE0E-0F41-4C11-9ECA-852B8587FF4E}"/>
+                <a16:creationId xmlns:a16="http://schemas.microsoft.com/office/drawing/2014/main" id="{E7AAD5BB-BC6B-400E-8F90-84FF5CDFF4C6}"/>
               </a:ext>
             </a:extLst>
           </p:cNvPr>
@@ -9255,7 +9263,7 @@
           <p:cNvPr id="4" name="">
             <a:extLst xmlns:a="http://schemas.openxmlformats.org/drawingml/2006/main">
               <a:ext uri="{FF2B5EF4-FFF2-40B4-BE49-F238E27FC236}">
-                <a16:creationId xmlns:a16="http://schemas.microsoft.com/office/drawing/2014/main" id="{129190AE-FCD4-4AEF-9F11-D22BDED3D6EA}"/>
+                <a16:creationId xmlns:a16="http://schemas.microsoft.com/office/drawing/2014/main" id="{2BFC8296-141F-4B36-ADC3-BF2DEF7B018F}"/>
               </a:ext>
             </a:extLst>
           </p:cNvPr>
@@ -9312,7 +9320,7 @@
           <p:cNvPr id="5" name="">
             <a:extLst xmlns:a="http://schemas.openxmlformats.org/drawingml/2006/main">
               <a:ext uri="{FF2B5EF4-FFF2-40B4-BE49-F238E27FC236}">
-                <a16:creationId xmlns:a16="http://schemas.microsoft.com/office/drawing/2014/main" id="{825C0A3B-6A38-4CBC-8124-14A4EF466C2B}"/>
+                <a16:creationId xmlns:a16="http://schemas.microsoft.com/office/drawing/2014/main" id="{E3EDF3E2-3723-45DE-B773-A7CE37A5146F}"/>
               </a:ext>
             </a:extLst>
           </p:cNvPr>
@@ -9369,7 +9377,7 @@
           <p:cNvPr id="6" name="">
             <a:extLst xmlns:a="http://schemas.openxmlformats.org/drawingml/2006/main">
               <a:ext uri="{FF2B5EF4-FFF2-40B4-BE49-F238E27FC236}">
-                <a16:creationId xmlns:a16="http://schemas.microsoft.com/office/drawing/2014/main" id="{4D37011B-C219-4646-A2B3-D8811024B57A}"/>
+                <a16:creationId xmlns:a16="http://schemas.microsoft.com/office/drawing/2014/main" id="{79E415E5-569B-4774-8F70-FF8A7C28A660}"/>
               </a:ext>
             </a:extLst>
           </p:cNvPr>
@@ -9426,7 +9434,7 @@
           <p:cNvPr id="7" name="">
             <a:extLst xmlns:a="http://schemas.openxmlformats.org/drawingml/2006/main">
               <a:ext uri="{FF2B5EF4-FFF2-40B4-BE49-F238E27FC236}">
-                <a16:creationId xmlns:a16="http://schemas.microsoft.com/office/drawing/2014/main" id="{627D565D-2DCC-4FE7-A6F2-A6A687E8F851}"/>
+                <a16:creationId xmlns:a16="http://schemas.microsoft.com/office/drawing/2014/main" id="{5C33A519-C057-4916-9C58-1EBE84FF5445}"/>
               </a:ext>
             </a:extLst>
           </p:cNvPr>
@@ -9458,7 +9466,7 @@
           <p:cNvPr id="8" name="">
             <a:extLst xmlns:a="http://schemas.openxmlformats.org/drawingml/2006/main">
               <a:ext uri="{FF2B5EF4-FFF2-40B4-BE49-F238E27FC236}">
-                <a16:creationId xmlns:a16="http://schemas.microsoft.com/office/drawing/2014/main" id="{B319DC33-37C5-414A-9DC4-5D8AD6BFE7A2}"/>
+                <a16:creationId xmlns:a16="http://schemas.microsoft.com/office/drawing/2014/main" id="{8DE2A2BE-23B3-42D9-AE53-B8CE6AB6C54C}"/>
               </a:ext>
             </a:extLst>
           </p:cNvPr>
@@ -9515,7 +9523,7 @@
           <p:cNvPr id="9" name="">
             <a:extLst xmlns:a="http://schemas.openxmlformats.org/drawingml/2006/main">
               <a:ext uri="{FF2B5EF4-FFF2-40B4-BE49-F238E27FC236}">
-                <a16:creationId xmlns:a16="http://schemas.microsoft.com/office/drawing/2014/main" id="{6D243C12-8AB7-425F-ADB9-4A15F1E6B540}"/>
+                <a16:creationId xmlns:a16="http://schemas.microsoft.com/office/drawing/2014/main" id="{6B96A489-42DF-46C2-811F-2F26272F7A31}"/>
               </a:ext>
             </a:extLst>
           </p:cNvPr>
@@ -9572,7 +9580,7 @@
           <p:cNvPr id="10" name="">
             <a:extLst xmlns:a="http://schemas.openxmlformats.org/drawingml/2006/main">
               <a:ext uri="{FF2B5EF4-FFF2-40B4-BE49-F238E27FC236}">
-                <a16:creationId xmlns:a16="http://schemas.microsoft.com/office/drawing/2014/main" id="{D81FD3E2-97AB-47FA-A05C-0A2EF8896B58}"/>
+                <a16:creationId xmlns:a16="http://schemas.microsoft.com/office/drawing/2014/main" id="{17606450-C4D8-4C13-98E9-BDC2C8D30C5F}"/>
               </a:ext>
             </a:extLst>
           </p:cNvPr>
@@ -9629,7 +9637,7 @@
           <p:cNvPr id="11" name="">
             <a:extLst xmlns:a="http://schemas.openxmlformats.org/drawingml/2006/main">
               <a:ext uri="{FF2B5EF4-FFF2-40B4-BE49-F238E27FC236}">
-                <a16:creationId xmlns:a16="http://schemas.microsoft.com/office/drawing/2014/main" id="{8EE4F3F3-79A1-4BCD-A88D-44D919D4E69A}"/>
+                <a16:creationId xmlns:a16="http://schemas.microsoft.com/office/drawing/2014/main" id="{B30E64BA-43D5-49DC-8881-D686C413C375}"/>
               </a:ext>
             </a:extLst>
           </p:cNvPr>
@@ -9686,7 +9694,7 @@
           <p:cNvPr id="12" name="">
             <a:extLst xmlns:a="http://schemas.openxmlformats.org/drawingml/2006/main">
               <a:ext uri="{FF2B5EF4-FFF2-40B4-BE49-F238E27FC236}">
-                <a16:creationId xmlns:a16="http://schemas.microsoft.com/office/drawing/2014/main" id="{A70ECF1C-2F8D-4805-9EDB-2D37EBA09F4B}"/>
+                <a16:creationId xmlns:a16="http://schemas.microsoft.com/office/drawing/2014/main" id="{A3D79F01-0B26-4846-AC5B-000A8CCDCE6D}"/>
               </a:ext>
             </a:extLst>
           </p:cNvPr>
@@ -9718,7 +9726,7 @@
           <p:cNvPr id="13" name="">
             <a:extLst xmlns:a="http://schemas.openxmlformats.org/drawingml/2006/main">
               <a:ext uri="{FF2B5EF4-FFF2-40B4-BE49-F238E27FC236}">
-                <a16:creationId xmlns:a16="http://schemas.microsoft.com/office/drawing/2014/main" id="{C10C5733-F699-4C96-ADE5-5A8BD9156456}"/>
+                <a16:creationId xmlns:a16="http://schemas.microsoft.com/office/drawing/2014/main" id="{79A8D40A-0D09-4368-B82A-B75672FEDCCE}"/>
               </a:ext>
             </a:extLst>
           </p:cNvPr>
@@ -9775,7 +9783,7 @@
           <p:cNvPr id="14" name="">
             <a:extLst xmlns:a="http://schemas.openxmlformats.org/drawingml/2006/main">
               <a:ext uri="{FF2B5EF4-FFF2-40B4-BE49-F238E27FC236}">
-                <a16:creationId xmlns:a16="http://schemas.microsoft.com/office/drawing/2014/main" id="{7766AA48-7A68-47D6-A129-F686FA369DC6}"/>
+                <a16:creationId xmlns:a16="http://schemas.microsoft.com/office/drawing/2014/main" id="{0D0BE6F1-844C-4F28-B31F-6D140BBF7DC4}"/>
               </a:ext>
             </a:extLst>
           </p:cNvPr>
@@ -9830,7 +9838,7 @@
     </p:spTree>
     <p:extLst>
       <p:ext uri="{BB962C8B-B14F-4D97-AF65-F5344CB8AC3E}">
-        <p14:creationId xmlns:p14="http://schemas.microsoft.com/office/powerpoint/2010/main" val="997888798"/>
+        <p14:creationId xmlns:p14="http://schemas.microsoft.com/office/powerpoint/2010/main" val="1025573180"/>
       </p:ext>
     </p:extLst>
   </p:cSld>
@@ -10031,7 +10039,7 @@
           <p:cNvPr id="16" name="">
             <a:extLst xmlns:a="http://schemas.openxmlformats.org/drawingml/2006/main">
               <a:ext uri="{FF2B5EF4-FFF2-40B4-BE49-F238E27FC236}">
-                <a16:creationId xmlns:a16="http://schemas.microsoft.com/office/drawing/2014/main" id="{3B48C41D-26AD-44EC-A221-FFA7F5CFD851}"/>
+                <a16:creationId xmlns:a16="http://schemas.microsoft.com/office/drawing/2014/main" id="{A16DDF20-B5D0-45CF-8FC0-64EBD78282DF}"/>
               </a:ext>
             </a:extLst>
           </p:cNvPr>
@@ -10063,7 +10071,7 @@
           <p:cNvPr id="2" name="">
             <a:extLst xmlns:a="http://schemas.openxmlformats.org/drawingml/2006/main">
               <a:ext uri="{FF2B5EF4-FFF2-40B4-BE49-F238E27FC236}">
-                <a16:creationId xmlns:a16="http://schemas.microsoft.com/office/drawing/2014/main" id="{C79A8699-D1D1-4666-B750-BEAD17333BD1}"/>
+                <a16:creationId xmlns:a16="http://schemas.microsoft.com/office/drawing/2014/main" id="{E9B90B4E-9A54-42A3-9E60-607B75459516}"/>
               </a:ext>
             </a:extLst>
           </p:cNvPr>
@@ -10120,7 +10128,7 @@
           <p:cNvPr id="3" name="">
             <a:extLst xmlns:a="http://schemas.openxmlformats.org/drawingml/2006/main">
               <a:ext uri="{FF2B5EF4-FFF2-40B4-BE49-F238E27FC236}">
-                <a16:creationId xmlns:a16="http://schemas.microsoft.com/office/drawing/2014/main" id="{D3F5842E-7004-4380-B155-63E39CDA7745}"/>
+                <a16:creationId xmlns:a16="http://schemas.microsoft.com/office/drawing/2014/main" id="{B908D6FD-D4A0-4E98-8027-3ED24E71487F}"/>
               </a:ext>
             </a:extLst>
           </p:cNvPr>
@@ -10152,7 +10160,7 @@
           <p:cNvPr id="4" name="">
             <a:extLst xmlns:a="http://schemas.openxmlformats.org/drawingml/2006/main">
               <a:ext uri="{FF2B5EF4-FFF2-40B4-BE49-F238E27FC236}">
-                <a16:creationId xmlns:a16="http://schemas.microsoft.com/office/drawing/2014/main" id="{52C69FB7-3BD6-4626-810F-2351FAB927C8}"/>
+                <a16:creationId xmlns:a16="http://schemas.microsoft.com/office/drawing/2014/main" id="{1B388561-4B46-4D0C-AFF5-5BD180AD0D4B}"/>
               </a:ext>
             </a:extLst>
           </p:cNvPr>
@@ -10209,7 +10217,7 @@
           <p:cNvPr id="5" name="">
             <a:extLst xmlns:a="http://schemas.openxmlformats.org/drawingml/2006/main">
               <a:ext uri="{FF2B5EF4-FFF2-40B4-BE49-F238E27FC236}">
-                <a16:creationId xmlns:a16="http://schemas.microsoft.com/office/drawing/2014/main" id="{C5A7748E-DB01-436F-9488-46791188A8F5}"/>
+                <a16:creationId xmlns:a16="http://schemas.microsoft.com/office/drawing/2014/main" id="{7F448241-ADE9-43FC-B252-C7F7BC9DB68C}"/>
               </a:ext>
             </a:extLst>
           </p:cNvPr>
@@ -10266,7 +10274,7 @@
           <p:cNvPr id="6" name="">
             <a:extLst xmlns:a="http://schemas.openxmlformats.org/drawingml/2006/main">
               <a:ext uri="{FF2B5EF4-FFF2-40B4-BE49-F238E27FC236}">
-                <a16:creationId xmlns:a16="http://schemas.microsoft.com/office/drawing/2014/main" id="{6BFB1864-0C1C-4BAB-A74C-80668EDC077F}"/>
+                <a16:creationId xmlns:a16="http://schemas.microsoft.com/office/drawing/2014/main" id="{CF1128DC-2BC8-418C-939D-1058FEAF62DC}"/>
               </a:ext>
             </a:extLst>
           </p:cNvPr>
@@ -10323,7 +10331,7 @@
           <p:cNvPr id="7" name="">
             <a:extLst xmlns:a="http://schemas.openxmlformats.org/drawingml/2006/main">
               <a:ext uri="{FF2B5EF4-FFF2-40B4-BE49-F238E27FC236}">
-                <a16:creationId xmlns:a16="http://schemas.microsoft.com/office/drawing/2014/main" id="{6D1346A6-43B1-49B4-8341-2DC095126548}"/>
+                <a16:creationId xmlns:a16="http://schemas.microsoft.com/office/drawing/2014/main" id="{B3CDCDFC-4C9F-481B-B2CC-6F806DC7CD77}"/>
               </a:ext>
             </a:extLst>
           </p:cNvPr>
@@ -10355,7 +10363,7 @@
           <p:cNvPr id="8" name="">
             <a:extLst xmlns:a="http://schemas.openxmlformats.org/drawingml/2006/main">
               <a:ext uri="{FF2B5EF4-FFF2-40B4-BE49-F238E27FC236}">
-                <a16:creationId xmlns:a16="http://schemas.microsoft.com/office/drawing/2014/main" id="{7025352A-8E11-466E-ADD6-27591A71AD08}"/>
+                <a16:creationId xmlns:a16="http://schemas.microsoft.com/office/drawing/2014/main" id="{01F63DE9-B6D9-4C95-94BF-BFAEF605B520}"/>
               </a:ext>
             </a:extLst>
           </p:cNvPr>
@@ -10412,7 +10420,7 @@
           <p:cNvPr id="9" name="">
             <a:extLst xmlns:a="http://schemas.openxmlformats.org/drawingml/2006/main">
               <a:ext uri="{FF2B5EF4-FFF2-40B4-BE49-F238E27FC236}">
-                <a16:creationId xmlns:a16="http://schemas.microsoft.com/office/drawing/2014/main" id="{678C800C-AF5A-4473-8655-214A27B81EBE}"/>
+                <a16:creationId xmlns:a16="http://schemas.microsoft.com/office/drawing/2014/main" id="{2B06C9D1-F19E-44E8-8F3E-73DCE71CAB2C}"/>
               </a:ext>
             </a:extLst>
           </p:cNvPr>
@@ -10469,7 +10477,7 @@
           <p:cNvPr id="10" name="">
             <a:extLst xmlns:a="http://schemas.openxmlformats.org/drawingml/2006/main">
               <a:ext uri="{FF2B5EF4-FFF2-40B4-BE49-F238E27FC236}">
-                <a16:creationId xmlns:a16="http://schemas.microsoft.com/office/drawing/2014/main" id="{ABC9AB41-116F-4CDC-9125-73B938F58857}"/>
+                <a16:creationId xmlns:a16="http://schemas.microsoft.com/office/drawing/2014/main" id="{A3479E7A-151D-48C5-A95F-E8DEF15ECBF7}"/>
               </a:ext>
             </a:extLst>
           </p:cNvPr>
@@ -10526,7 +10534,7 @@
           <p:cNvPr id="11" name="">
             <a:extLst xmlns:a="http://schemas.openxmlformats.org/drawingml/2006/main">
               <a:ext uri="{FF2B5EF4-FFF2-40B4-BE49-F238E27FC236}">
-                <a16:creationId xmlns:a16="http://schemas.microsoft.com/office/drawing/2014/main" id="{A4D94187-2229-48F1-A322-2DB48983C05E}"/>
+                <a16:creationId xmlns:a16="http://schemas.microsoft.com/office/drawing/2014/main" id="{33C48436-3FA1-40D4-971D-9FAD5FFB5DF6}"/>
               </a:ext>
             </a:extLst>
           </p:cNvPr>
@@ -10583,7 +10591,7 @@
           <p:cNvPr id="12" name="">
             <a:extLst xmlns:a="http://schemas.openxmlformats.org/drawingml/2006/main">
               <a:ext uri="{FF2B5EF4-FFF2-40B4-BE49-F238E27FC236}">
-                <a16:creationId xmlns:a16="http://schemas.microsoft.com/office/drawing/2014/main" id="{25F9496D-4E28-4AAA-8A2F-E8303CA64B76}"/>
+                <a16:creationId xmlns:a16="http://schemas.microsoft.com/office/drawing/2014/main" id="{C7382676-EDEA-42B2-B359-FC1774DA651A}"/>
               </a:ext>
             </a:extLst>
           </p:cNvPr>
@@ -10640,7 +10648,7 @@
           <p:cNvPr id="13" name="">
             <a:extLst xmlns:a="http://schemas.openxmlformats.org/drawingml/2006/main">
               <a:ext uri="{FF2B5EF4-FFF2-40B4-BE49-F238E27FC236}">
-                <a16:creationId xmlns:a16="http://schemas.microsoft.com/office/drawing/2014/main" id="{8404AE93-FC6D-42D0-80F0-3D0BE3327B6E}"/>
+                <a16:creationId xmlns:a16="http://schemas.microsoft.com/office/drawing/2014/main" id="{BF36A9AE-FA96-416F-B90B-9972D7B4F6AE}"/>
               </a:ext>
             </a:extLst>
           </p:cNvPr>
@@ -10697,7 +10705,7 @@
           <p:cNvPr id="14" name="">
             <a:extLst xmlns:a="http://schemas.openxmlformats.org/drawingml/2006/main">
               <a:ext uri="{FF2B5EF4-FFF2-40B4-BE49-F238E27FC236}">
-                <a16:creationId xmlns:a16="http://schemas.microsoft.com/office/drawing/2014/main" id="{6DF75608-A9C6-43AC-9192-92AFBB34431D}"/>
+                <a16:creationId xmlns:a16="http://schemas.microsoft.com/office/drawing/2014/main" id="{00A89DEE-7131-4F8B-8E0C-85EB60519391}"/>
               </a:ext>
             </a:extLst>
           </p:cNvPr>
@@ -10754,7 +10762,7 @@
           <p:cNvPr id="15" name="">
             <a:extLst xmlns:a="http://schemas.openxmlformats.org/drawingml/2006/main">
               <a:ext uri="{FF2B5EF4-FFF2-40B4-BE49-F238E27FC236}">
-                <a16:creationId xmlns:a16="http://schemas.microsoft.com/office/drawing/2014/main" id="{72E48256-E65B-4DDE-A33E-C6080B52B9C6}"/>
+                <a16:creationId xmlns:a16="http://schemas.microsoft.com/office/drawing/2014/main" id="{14557904-A8DE-4721-BA74-ABD896C3B756}"/>
               </a:ext>
             </a:extLst>
           </p:cNvPr>
@@ -10809,7 +10817,7 @@
     </p:spTree>
     <p:extLst>
       <p:ext uri="{BB962C8B-B14F-4D97-AF65-F5344CB8AC3E}">
-        <p14:creationId xmlns:p14="http://schemas.microsoft.com/office/powerpoint/2010/main" val="99005798"/>
+        <p14:creationId xmlns:p14="http://schemas.microsoft.com/office/powerpoint/2010/main" val="2049782388"/>
       </p:ext>
     </p:extLst>
   </p:cSld>
@@ -10964,7 +10972,7 @@
           <p:cNvPr id="16" name="">
             <a:extLst xmlns:a="http://schemas.openxmlformats.org/drawingml/2006/main">
               <a:ext uri="{FF2B5EF4-FFF2-40B4-BE49-F238E27FC236}">
-                <a16:creationId xmlns:a16="http://schemas.microsoft.com/office/drawing/2014/main" id="{71FA72E1-FFF2-4EC3-B507-66BF34E57790}"/>
+                <a16:creationId xmlns:a16="http://schemas.microsoft.com/office/drawing/2014/main" id="{4B729EC0-8535-43A1-B13A-E2B5D65A8EA6}"/>
               </a:ext>
             </a:extLst>
           </p:cNvPr>
@@ -10996,7 +11004,7 @@
           <p:cNvPr id="2" name="">
             <a:extLst xmlns:a="http://schemas.openxmlformats.org/drawingml/2006/main">
               <a:ext uri="{FF2B5EF4-FFF2-40B4-BE49-F238E27FC236}">
-                <a16:creationId xmlns:a16="http://schemas.microsoft.com/office/drawing/2014/main" id="{FB3D20B2-FFDF-4C95-806B-838DF7ACE6EA}"/>
+                <a16:creationId xmlns:a16="http://schemas.microsoft.com/office/drawing/2014/main" id="{EB244A45-79FD-4B56-BB77-4DE0C2F6A3E4}"/>
               </a:ext>
             </a:extLst>
           </p:cNvPr>
@@ -11053,7 +11061,7 @@
           <p:cNvPr id="3" name="">
             <a:extLst xmlns:a="http://schemas.openxmlformats.org/drawingml/2006/main">
               <a:ext uri="{FF2B5EF4-FFF2-40B4-BE49-F238E27FC236}">
-                <a16:creationId xmlns:a16="http://schemas.microsoft.com/office/drawing/2014/main" id="{0F84A83B-725F-4279-96D2-E8ED87284C32}"/>
+                <a16:creationId xmlns:a16="http://schemas.microsoft.com/office/drawing/2014/main" id="{1D992282-BFC5-457D-9EE1-16D3C1A4EA3B}"/>
               </a:ext>
             </a:extLst>
           </p:cNvPr>
@@ -11085,7 +11093,7 @@
           <p:cNvPr id="4" name="">
             <a:extLst xmlns:a="http://schemas.openxmlformats.org/drawingml/2006/main">
               <a:ext uri="{FF2B5EF4-FFF2-40B4-BE49-F238E27FC236}">
-                <a16:creationId xmlns:a16="http://schemas.microsoft.com/office/drawing/2014/main" id="{90CC0ABE-64A3-4B50-ACB9-318866C27899}"/>
+                <a16:creationId xmlns:a16="http://schemas.microsoft.com/office/drawing/2014/main" id="{8AD156EB-5AC5-4A9E-A0C4-BEA1A9E65837}"/>
               </a:ext>
             </a:extLst>
           </p:cNvPr>
@@ -11142,7 +11150,7 @@
           <p:cNvPr id="5" name="">
             <a:extLst xmlns:a="http://schemas.openxmlformats.org/drawingml/2006/main">
               <a:ext uri="{FF2B5EF4-FFF2-40B4-BE49-F238E27FC236}">
-                <a16:creationId xmlns:a16="http://schemas.microsoft.com/office/drawing/2014/main" id="{5A406CC2-98EC-44E8-B027-60B31A351492}"/>
+                <a16:creationId xmlns:a16="http://schemas.microsoft.com/office/drawing/2014/main" id="{3D6ECF94-CC0A-4A49-BFE3-63EF1B4D4592}"/>
               </a:ext>
             </a:extLst>
           </p:cNvPr>
@@ -11199,7 +11207,7 @@
           <p:cNvPr id="6" name="">
             <a:extLst xmlns:a="http://schemas.openxmlformats.org/drawingml/2006/main">
               <a:ext uri="{FF2B5EF4-FFF2-40B4-BE49-F238E27FC236}">
-                <a16:creationId xmlns:a16="http://schemas.microsoft.com/office/drawing/2014/main" id="{4AADAC02-307D-4554-974E-DA16A046EEB1}"/>
+                <a16:creationId xmlns:a16="http://schemas.microsoft.com/office/drawing/2014/main" id="{DE67CB27-27B8-4125-AD13-8FBCFE805DF4}"/>
               </a:ext>
             </a:extLst>
           </p:cNvPr>
@@ -11256,7 +11264,7 @@
           <p:cNvPr id="7" name="">
             <a:extLst xmlns:a="http://schemas.openxmlformats.org/drawingml/2006/main">
               <a:ext uri="{FF2B5EF4-FFF2-40B4-BE49-F238E27FC236}">
-                <a16:creationId xmlns:a16="http://schemas.microsoft.com/office/drawing/2014/main" id="{10835744-E86E-45F5-BEC4-21D96C37D26F}"/>
+                <a16:creationId xmlns:a16="http://schemas.microsoft.com/office/drawing/2014/main" id="{A4D12895-236C-4018-AB8E-EF7CF23745D5}"/>
               </a:ext>
             </a:extLst>
           </p:cNvPr>
@@ -11288,7 +11296,7 @@
           <p:cNvPr id="8" name="">
             <a:extLst xmlns:a="http://schemas.openxmlformats.org/drawingml/2006/main">
               <a:ext uri="{FF2B5EF4-FFF2-40B4-BE49-F238E27FC236}">
-                <a16:creationId xmlns:a16="http://schemas.microsoft.com/office/drawing/2014/main" id="{EDAB64F0-BAA8-47BD-9CB8-D940420784B7}"/>
+                <a16:creationId xmlns:a16="http://schemas.microsoft.com/office/drawing/2014/main" id="{E0A1C7EA-F7CE-4DD3-A626-16089DDD2B71}"/>
               </a:ext>
             </a:extLst>
           </p:cNvPr>
@@ -11345,7 +11353,7 @@
           <p:cNvPr id="9" name="">
             <a:extLst xmlns:a="http://schemas.openxmlformats.org/drawingml/2006/main">
               <a:ext uri="{FF2B5EF4-FFF2-40B4-BE49-F238E27FC236}">
-                <a16:creationId xmlns:a16="http://schemas.microsoft.com/office/drawing/2014/main" id="{9E4F22D3-05FB-4A08-9611-73D7F1E09B87}"/>
+                <a16:creationId xmlns:a16="http://schemas.microsoft.com/office/drawing/2014/main" id="{E49DC8E5-46ED-4649-8697-6DEF4A5AF9DF}"/>
               </a:ext>
             </a:extLst>
           </p:cNvPr>
@@ -11406,7 +11414,7 @@
           <p:nvPr/>
         </p:nvPicPr>
         <p:blipFill>
-          <a:blip xmlns:r="http://schemas.openxmlformats.org/officeDocument/2006/relationships" xmlns:a="http://schemas.openxmlformats.org/drawingml/2006/main" r:embed="R8b0dc90fcaa944e0"/>
+          <a:blip xmlns:r="http://schemas.openxmlformats.org/officeDocument/2006/relationships" xmlns:a="http://schemas.openxmlformats.org/drawingml/2006/main" r:embed="R5ebba1c8b4524811"/>
           <a:stretch xmlns:a="http://schemas.openxmlformats.org/drawingml/2006/main"/>
         </p:blipFill>
         <p:spPr>
@@ -11424,7 +11432,7 @@
           <p:cNvPr id="11" name="">
             <a:extLst xmlns:a="http://schemas.openxmlformats.org/drawingml/2006/main">
               <a:ext uri="{FF2B5EF4-FFF2-40B4-BE49-F238E27FC236}">
-                <a16:creationId xmlns:a16="http://schemas.microsoft.com/office/drawing/2014/main" id="{2F7B3800-94A7-4481-9B4B-113BD7A52E30}"/>
+                <a16:creationId xmlns:a16="http://schemas.microsoft.com/office/drawing/2014/main" id="{E7567B1D-F8FC-488D-8E95-2FF9CD88BE65}"/>
               </a:ext>
             </a:extLst>
           </p:cNvPr>
@@ -11481,7 +11489,7 @@
           <p:cNvPr id="12" name="">
             <a:extLst xmlns:a="http://schemas.openxmlformats.org/drawingml/2006/main">
               <a:ext uri="{FF2B5EF4-FFF2-40B4-BE49-F238E27FC236}">
-                <a16:creationId xmlns:a16="http://schemas.microsoft.com/office/drawing/2014/main" id="{97687D97-DF18-4B25-A19F-09A827A77B1F}"/>
+                <a16:creationId xmlns:a16="http://schemas.microsoft.com/office/drawing/2014/main" id="{E2A9677A-DB3D-4ABB-8E61-703566FB0099}"/>
               </a:ext>
             </a:extLst>
           </p:cNvPr>
@@ -11538,7 +11546,7 @@
           <p:cNvPr id="13" name="">
             <a:extLst xmlns:a="http://schemas.openxmlformats.org/drawingml/2006/main">
               <a:ext uri="{FF2B5EF4-FFF2-40B4-BE49-F238E27FC236}">
-                <a16:creationId xmlns:a16="http://schemas.microsoft.com/office/drawing/2014/main" id="{D60EE51D-5508-4382-86E5-DF161001198A}"/>
+                <a16:creationId xmlns:a16="http://schemas.microsoft.com/office/drawing/2014/main" id="{5B0B6394-B7F6-4DAF-B973-8CBC41279F2A}"/>
               </a:ext>
             </a:extLst>
           </p:cNvPr>
@@ -11570,7 +11578,7 @@
           <p:cNvPr id="14" name="">
             <a:extLst xmlns:a="http://schemas.openxmlformats.org/drawingml/2006/main">
               <a:ext uri="{FF2B5EF4-FFF2-40B4-BE49-F238E27FC236}">
-                <a16:creationId xmlns:a16="http://schemas.microsoft.com/office/drawing/2014/main" id="{32E7C1F4-E4F6-43EB-AA07-037A1E2E1BFA}"/>
+                <a16:creationId xmlns:a16="http://schemas.microsoft.com/office/drawing/2014/main" id="{7AD2F074-DC95-4A4D-B1F2-75FD4F1B3F85}"/>
               </a:ext>
             </a:extLst>
           </p:cNvPr>
@@ -11627,7 +11635,7 @@
           <p:cNvPr id="15" name="">
             <a:extLst xmlns:a="http://schemas.openxmlformats.org/drawingml/2006/main">
               <a:ext uri="{FF2B5EF4-FFF2-40B4-BE49-F238E27FC236}">
-                <a16:creationId xmlns:a16="http://schemas.microsoft.com/office/drawing/2014/main" id="{CB779085-61B4-4EA7-BD71-2199AA772768}"/>
+                <a16:creationId xmlns:a16="http://schemas.microsoft.com/office/drawing/2014/main" id="{BD826418-C722-4217-8A67-28A9AACFB4FB}"/>
               </a:ext>
             </a:extLst>
           </p:cNvPr>
@@ -11682,7 +11690,7 @@
     </p:spTree>
     <p:extLst>
       <p:ext uri="{BB962C8B-B14F-4D97-AF65-F5344CB8AC3E}">
-        <p14:creationId xmlns:p14="http://schemas.microsoft.com/office/powerpoint/2010/main" val="1474651602"/>
+        <p14:creationId xmlns:p14="http://schemas.microsoft.com/office/powerpoint/2010/main" val="1945581417"/>
       </p:ext>
     </p:extLst>
   </p:cSld>
@@ -11837,7 +11845,7 @@
           <p:cNvPr id="23" name="">
             <a:extLst xmlns:a="http://schemas.openxmlformats.org/drawingml/2006/main">
               <a:ext uri="{FF2B5EF4-FFF2-40B4-BE49-F238E27FC236}">
-                <a16:creationId xmlns:a16="http://schemas.microsoft.com/office/drawing/2014/main" id="{EA011BAD-0F65-4156-B918-DEE281CB9CA2}"/>
+                <a16:creationId xmlns:a16="http://schemas.microsoft.com/office/drawing/2014/main" id="{71AA6446-C594-4319-B9FA-04B2B761D3B4}"/>
               </a:ext>
             </a:extLst>
           </p:cNvPr>
@@ -11869,7 +11877,7 @@
           <p:cNvPr id="2" name="">
             <a:extLst xmlns:a="http://schemas.openxmlformats.org/drawingml/2006/main">
               <a:ext uri="{FF2B5EF4-FFF2-40B4-BE49-F238E27FC236}">
-                <a16:creationId xmlns:a16="http://schemas.microsoft.com/office/drawing/2014/main" id="{9D84EB10-48AB-41A1-BCCF-C938882DD46A}"/>
+                <a16:creationId xmlns:a16="http://schemas.microsoft.com/office/drawing/2014/main" id="{5E7E0DFE-218E-43D1-9F8C-B784413E3E43}"/>
               </a:ext>
             </a:extLst>
           </p:cNvPr>
@@ -11926,7 +11934,7 @@
           <p:cNvPr id="3" name="">
             <a:extLst xmlns:a="http://schemas.openxmlformats.org/drawingml/2006/main">
               <a:ext uri="{FF2B5EF4-FFF2-40B4-BE49-F238E27FC236}">
-                <a16:creationId xmlns:a16="http://schemas.microsoft.com/office/drawing/2014/main" id="{32178685-0D6B-4454-867A-97B8661F4311}"/>
+                <a16:creationId xmlns:a16="http://schemas.microsoft.com/office/drawing/2014/main" id="{8250D836-D0A9-4EEA-A076-70E6483685C8}"/>
               </a:ext>
             </a:extLst>
           </p:cNvPr>
@@ -11958,7 +11966,7 @@
           <p:cNvPr id="4" name="">
             <a:extLst xmlns:a="http://schemas.openxmlformats.org/drawingml/2006/main">
               <a:ext uri="{FF2B5EF4-FFF2-40B4-BE49-F238E27FC236}">
-                <a16:creationId xmlns:a16="http://schemas.microsoft.com/office/drawing/2014/main" id="{20E7A953-E92B-4F89-8D84-3A8F93B23288}"/>
+                <a16:creationId xmlns:a16="http://schemas.microsoft.com/office/drawing/2014/main" id="{981BD1E8-76C8-4E9E-BD9C-603DA84147AE}"/>
               </a:ext>
             </a:extLst>
           </p:cNvPr>
@@ -12015,7 +12023,7 @@
           <p:cNvPr id="5" name="">
             <a:extLst xmlns:a="http://schemas.openxmlformats.org/drawingml/2006/main">
               <a:ext uri="{FF2B5EF4-FFF2-40B4-BE49-F238E27FC236}">
-                <a16:creationId xmlns:a16="http://schemas.microsoft.com/office/drawing/2014/main" id="{DB9641FB-460F-4248-AF73-FF4FCC1E7D77}"/>
+                <a16:creationId xmlns:a16="http://schemas.microsoft.com/office/drawing/2014/main" id="{2293A567-E539-4B78-9EA3-18EDE9AB909F}"/>
               </a:ext>
             </a:extLst>
           </p:cNvPr>
@@ -12072,7 +12080,7 @@
           <p:cNvPr id="6" name="">
             <a:extLst xmlns:a="http://schemas.openxmlformats.org/drawingml/2006/main">
               <a:ext uri="{FF2B5EF4-FFF2-40B4-BE49-F238E27FC236}">
-                <a16:creationId xmlns:a16="http://schemas.microsoft.com/office/drawing/2014/main" id="{95D44B1A-9987-40ED-8F82-B4AA4EC315A9}"/>
+                <a16:creationId xmlns:a16="http://schemas.microsoft.com/office/drawing/2014/main" id="{273EBEF5-E97B-45D1-9559-DBFDCB11B4BD}"/>
               </a:ext>
             </a:extLst>
           </p:cNvPr>
@@ -12129,7 +12137,7 @@
           <p:cNvPr id="7" name="">
             <a:extLst xmlns:a="http://schemas.openxmlformats.org/drawingml/2006/main">
               <a:ext uri="{FF2B5EF4-FFF2-40B4-BE49-F238E27FC236}">
-                <a16:creationId xmlns:a16="http://schemas.microsoft.com/office/drawing/2014/main" id="{557694BC-F59E-49DC-88EC-E93DFF346616}"/>
+                <a16:creationId xmlns:a16="http://schemas.microsoft.com/office/drawing/2014/main" id="{90D3B0D0-2F1F-4ABE-BF58-82BF3A76DEC3}"/>
               </a:ext>
             </a:extLst>
           </p:cNvPr>
@@ -12161,7 +12169,7 @@
           <p:cNvPr id="8" name="">
             <a:extLst xmlns:a="http://schemas.openxmlformats.org/drawingml/2006/main">
               <a:ext uri="{FF2B5EF4-FFF2-40B4-BE49-F238E27FC236}">
-                <a16:creationId xmlns:a16="http://schemas.microsoft.com/office/drawing/2014/main" id="{1751BD79-A9D8-447B-AF5B-9831A1DD44F7}"/>
+                <a16:creationId xmlns:a16="http://schemas.microsoft.com/office/drawing/2014/main" id="{43E6B9FD-99A7-485D-85F5-61381F07D9B8}"/>
               </a:ext>
             </a:extLst>
           </p:cNvPr>
@@ -12218,7 +12226,7 @@
           <p:cNvPr id="9" name="">
             <a:extLst xmlns:a="http://schemas.openxmlformats.org/drawingml/2006/main">
               <a:ext uri="{FF2B5EF4-FFF2-40B4-BE49-F238E27FC236}">
-                <a16:creationId xmlns:a16="http://schemas.microsoft.com/office/drawing/2014/main" id="{465CB545-DB19-4D7F-AE5A-56213A8B044D}"/>
+                <a16:creationId xmlns:a16="http://schemas.microsoft.com/office/drawing/2014/main" id="{48140F35-1345-45FA-9E5D-D4D6B5A37733}"/>
               </a:ext>
             </a:extLst>
           </p:cNvPr>
@@ -12275,7 +12283,7 @@
           <p:cNvPr id="10" name="">
             <a:extLst xmlns:a="http://schemas.openxmlformats.org/drawingml/2006/main">
               <a:ext uri="{FF2B5EF4-FFF2-40B4-BE49-F238E27FC236}">
-                <a16:creationId xmlns:a16="http://schemas.microsoft.com/office/drawing/2014/main" id="{05259416-C85E-4D47-A5D9-F1447C1387FB}"/>
+                <a16:creationId xmlns:a16="http://schemas.microsoft.com/office/drawing/2014/main" id="{8C872BDD-85D5-4D1D-A2ED-776F24B86599}"/>
               </a:ext>
             </a:extLst>
           </p:cNvPr>
@@ -12309,7 +12317,7 @@
           <p:cNvPr id="11" name="">
             <a:extLst xmlns:a="http://schemas.openxmlformats.org/drawingml/2006/main">
               <a:ext uri="{FF2B5EF4-FFF2-40B4-BE49-F238E27FC236}">
-                <a16:creationId xmlns:a16="http://schemas.microsoft.com/office/drawing/2014/main" id="{4C10FAC6-E9E8-415C-9B1E-223099F7B88F}"/>
+                <a16:creationId xmlns:a16="http://schemas.microsoft.com/office/drawing/2014/main" id="{D4D89E28-CBD2-4A20-A0E0-F486F1C371FC}"/>
               </a:ext>
             </a:extLst>
           </p:cNvPr>
@@ -12341,7 +12349,7 @@
           <p:cNvPr id="12" name="">
             <a:extLst xmlns:a="http://schemas.openxmlformats.org/drawingml/2006/main">
               <a:ext uri="{FF2B5EF4-FFF2-40B4-BE49-F238E27FC236}">
-                <a16:creationId xmlns:a16="http://schemas.microsoft.com/office/drawing/2014/main" id="{D5DEB648-BB7E-4BC6-966B-FF2D80221C9A}"/>
+                <a16:creationId xmlns:a16="http://schemas.microsoft.com/office/drawing/2014/main" id="{8EAE7FFF-79B3-466B-BF89-15A8AFF8FB39}"/>
               </a:ext>
             </a:extLst>
           </p:cNvPr>
@@ -12398,7 +12406,7 @@
           <p:cNvPr id="13" name="">
             <a:extLst xmlns:a="http://schemas.openxmlformats.org/drawingml/2006/main">
               <a:ext uri="{FF2B5EF4-FFF2-40B4-BE49-F238E27FC236}">
-                <a16:creationId xmlns:a16="http://schemas.microsoft.com/office/drawing/2014/main" id="{4B249F7F-4F40-4E5A-8F9A-6F848FFE610D}"/>
+                <a16:creationId xmlns:a16="http://schemas.microsoft.com/office/drawing/2014/main" id="{89DD1707-D036-4B13-ADEC-4A37B4D412C5}"/>
               </a:ext>
             </a:extLst>
           </p:cNvPr>
@@ -12455,7 +12463,7 @@
           <p:cNvPr id="14" name="">
             <a:extLst xmlns:a="http://schemas.openxmlformats.org/drawingml/2006/main">
               <a:ext uri="{FF2B5EF4-FFF2-40B4-BE49-F238E27FC236}">
-                <a16:creationId xmlns:a16="http://schemas.microsoft.com/office/drawing/2014/main" id="{10442F0D-65A8-46F6-9E0B-D3A246640698}"/>
+                <a16:creationId xmlns:a16="http://schemas.microsoft.com/office/drawing/2014/main" id="{C0FFB52C-BF39-4D32-9B2B-33A99A1745D6}"/>
               </a:ext>
             </a:extLst>
           </p:cNvPr>
@@ -12489,7 +12497,7 @@
           <p:cNvPr id="15" name="">
             <a:extLst xmlns:a="http://schemas.openxmlformats.org/drawingml/2006/main">
               <a:ext uri="{FF2B5EF4-FFF2-40B4-BE49-F238E27FC236}">
-                <a16:creationId xmlns:a16="http://schemas.microsoft.com/office/drawing/2014/main" id="{6DC6E31E-061D-4A9B-B909-4E5E7F7BCAD4}"/>
+                <a16:creationId xmlns:a16="http://schemas.microsoft.com/office/drawing/2014/main" id="{9B72CD4C-B200-4C14-9FEB-4486D23DCCF6}"/>
               </a:ext>
             </a:extLst>
           </p:cNvPr>
@@ -12521,7 +12529,7 @@
           <p:cNvPr id="16" name="">
             <a:extLst xmlns:a="http://schemas.openxmlformats.org/drawingml/2006/main">
               <a:ext uri="{FF2B5EF4-FFF2-40B4-BE49-F238E27FC236}">
-                <a16:creationId xmlns:a16="http://schemas.microsoft.com/office/drawing/2014/main" id="{82CE4956-0681-4A9A-8DEE-A940C238A78A}"/>
+                <a16:creationId xmlns:a16="http://schemas.microsoft.com/office/drawing/2014/main" id="{1BA8FED6-0890-478E-83E4-29CF632451BB}"/>
               </a:ext>
             </a:extLst>
           </p:cNvPr>
@@ -12578,7 +12586,7 @@
           <p:cNvPr id="17" name="">
             <a:extLst xmlns:a="http://schemas.openxmlformats.org/drawingml/2006/main">
               <a:ext uri="{FF2B5EF4-FFF2-40B4-BE49-F238E27FC236}">
-                <a16:creationId xmlns:a16="http://schemas.microsoft.com/office/drawing/2014/main" id="{F91C0457-0969-4277-A549-76F8C966B607}"/>
+                <a16:creationId xmlns:a16="http://schemas.microsoft.com/office/drawing/2014/main" id="{8908F64E-29B7-49A8-B335-6E4AE5929A59}"/>
               </a:ext>
             </a:extLst>
           </p:cNvPr>
@@ -12635,7 +12643,7 @@
           <p:cNvPr id="18" name="">
             <a:extLst xmlns:a="http://schemas.openxmlformats.org/drawingml/2006/main">
               <a:ext uri="{FF2B5EF4-FFF2-40B4-BE49-F238E27FC236}">
-                <a16:creationId xmlns:a16="http://schemas.microsoft.com/office/drawing/2014/main" id="{6B7AE4BC-B06E-4F03-ADAE-C856A28812F1}"/>
+                <a16:creationId xmlns:a16="http://schemas.microsoft.com/office/drawing/2014/main" id="{9A0E1A8D-F57F-4DE2-8CE6-8C936F1C1D63}"/>
               </a:ext>
             </a:extLst>
           </p:cNvPr>
@@ -12669,7 +12677,7 @@
           <p:cNvPr id="19" name="">
             <a:extLst xmlns:a="http://schemas.openxmlformats.org/drawingml/2006/main">
               <a:ext uri="{FF2B5EF4-FFF2-40B4-BE49-F238E27FC236}">
-                <a16:creationId xmlns:a16="http://schemas.microsoft.com/office/drawing/2014/main" id="{1EA3B908-3BEE-4CBA-B2B8-1110ED903836}"/>
+                <a16:creationId xmlns:a16="http://schemas.microsoft.com/office/drawing/2014/main" id="{C784F5D0-A2F8-4344-B035-2267AA4F47BA}"/>
               </a:ext>
             </a:extLst>
           </p:cNvPr>
@@ -12701,7 +12709,7 @@
           <p:cNvPr id="20" name="">
             <a:extLst xmlns:a="http://schemas.openxmlformats.org/drawingml/2006/main">
               <a:ext uri="{FF2B5EF4-FFF2-40B4-BE49-F238E27FC236}">
-                <a16:creationId xmlns:a16="http://schemas.microsoft.com/office/drawing/2014/main" id="{9DE514F5-79BE-491C-9CD1-D2AA39E741FE}"/>
+                <a16:creationId xmlns:a16="http://schemas.microsoft.com/office/drawing/2014/main" id="{6D7837FD-DE86-4A55-A752-53771B2E0316}"/>
               </a:ext>
             </a:extLst>
           </p:cNvPr>
@@ -12758,7 +12766,7 @@
           <p:cNvPr id="21" name="">
             <a:extLst xmlns:a="http://schemas.openxmlformats.org/drawingml/2006/main">
               <a:ext uri="{FF2B5EF4-FFF2-40B4-BE49-F238E27FC236}">
-                <a16:creationId xmlns:a16="http://schemas.microsoft.com/office/drawing/2014/main" id="{87CC6C36-D587-4A95-BB35-FCF1C73457B2}"/>
+                <a16:creationId xmlns:a16="http://schemas.microsoft.com/office/drawing/2014/main" id="{0CC23023-87D0-41D8-A4EE-366C39FFD5E4}"/>
               </a:ext>
             </a:extLst>
           </p:cNvPr>
@@ -12815,7 +12823,7 @@
           <p:cNvPr id="22" name="">
             <a:extLst xmlns:a="http://schemas.openxmlformats.org/drawingml/2006/main">
               <a:ext uri="{FF2B5EF4-FFF2-40B4-BE49-F238E27FC236}">
-                <a16:creationId xmlns:a16="http://schemas.microsoft.com/office/drawing/2014/main" id="{CACE85B0-9E1B-472D-9121-F2EB4617F770}"/>
+                <a16:creationId xmlns:a16="http://schemas.microsoft.com/office/drawing/2014/main" id="{2B30C3FE-27A7-4F96-B7A9-67B95F38BCA8}"/>
               </a:ext>
             </a:extLst>
           </p:cNvPr>
@@ -12870,7 +12878,7 @@
     </p:spTree>
     <p:extLst>
       <p:ext uri="{BB962C8B-B14F-4D97-AF65-F5344CB8AC3E}">
-        <p14:creationId xmlns:p14="http://schemas.microsoft.com/office/powerpoint/2010/main" val="227121086"/>
+        <p14:creationId xmlns:p14="http://schemas.microsoft.com/office/powerpoint/2010/main" val="2089724649"/>
       </p:ext>
     </p:extLst>
   </p:cSld>
@@ -13071,7 +13079,7 @@
           <p:cNvPr id="22" name="">
             <a:extLst xmlns:a="http://schemas.openxmlformats.org/drawingml/2006/main">
               <a:ext uri="{FF2B5EF4-FFF2-40B4-BE49-F238E27FC236}">
-                <a16:creationId xmlns:a16="http://schemas.microsoft.com/office/drawing/2014/main" id="{DD30F775-50C1-4B4C-B38A-1F437808EC52}"/>
+                <a16:creationId xmlns:a16="http://schemas.microsoft.com/office/drawing/2014/main" id="{C932A19D-D8F7-480E-ADAF-674C84523E37}"/>
               </a:ext>
             </a:extLst>
           </p:cNvPr>
@@ -13103,7 +13111,7 @@
           <p:cNvPr id="2" name="">
             <a:extLst xmlns:a="http://schemas.openxmlformats.org/drawingml/2006/main">
               <a:ext uri="{FF2B5EF4-FFF2-40B4-BE49-F238E27FC236}">
-                <a16:creationId xmlns:a16="http://schemas.microsoft.com/office/drawing/2014/main" id="{EB7CFC5D-1D37-4254-AABF-2D6AF028D642}"/>
+                <a16:creationId xmlns:a16="http://schemas.microsoft.com/office/drawing/2014/main" id="{50DF5D5A-42F5-4166-AE88-F351A356E179}"/>
               </a:ext>
             </a:extLst>
           </p:cNvPr>
@@ -13160,7 +13168,7 @@
           <p:cNvPr id="3" name="">
             <a:extLst xmlns:a="http://schemas.openxmlformats.org/drawingml/2006/main">
               <a:ext uri="{FF2B5EF4-FFF2-40B4-BE49-F238E27FC236}">
-                <a16:creationId xmlns:a16="http://schemas.microsoft.com/office/drawing/2014/main" id="{863E8E8B-8F0F-42FE-8E79-5B1B33B259D8}"/>
+                <a16:creationId xmlns:a16="http://schemas.microsoft.com/office/drawing/2014/main" id="{B3A07852-1201-4647-96F6-13F2AE897D72}"/>
               </a:ext>
             </a:extLst>
           </p:cNvPr>
@@ -13192,7 +13200,7 @@
           <p:cNvPr id="4" name="">
             <a:extLst xmlns:a="http://schemas.openxmlformats.org/drawingml/2006/main">
               <a:ext uri="{FF2B5EF4-FFF2-40B4-BE49-F238E27FC236}">
-                <a16:creationId xmlns:a16="http://schemas.microsoft.com/office/drawing/2014/main" id="{5D6B4231-5FDD-49D0-B13B-7169D138CB5A}"/>
+                <a16:creationId xmlns:a16="http://schemas.microsoft.com/office/drawing/2014/main" id="{80AAA65A-8FB6-4C3D-9FB1-7A1EBAF14BF9}"/>
               </a:ext>
             </a:extLst>
           </p:cNvPr>
@@ -13249,7 +13257,7 @@
           <p:cNvPr id="5" name="">
             <a:extLst xmlns:a="http://schemas.openxmlformats.org/drawingml/2006/main">
               <a:ext uri="{FF2B5EF4-FFF2-40B4-BE49-F238E27FC236}">
-                <a16:creationId xmlns:a16="http://schemas.microsoft.com/office/drawing/2014/main" id="{5AC7C625-0DE0-4B35-8972-2B5DF43932C7}"/>
+                <a16:creationId xmlns:a16="http://schemas.microsoft.com/office/drawing/2014/main" id="{1EADE04C-1240-4DB2-A579-B7F2BB9F4F4D}"/>
               </a:ext>
             </a:extLst>
           </p:cNvPr>
@@ -13306,7 +13314,7 @@
           <p:cNvPr id="6" name="">
             <a:extLst xmlns:a="http://schemas.openxmlformats.org/drawingml/2006/main">
               <a:ext uri="{FF2B5EF4-FFF2-40B4-BE49-F238E27FC236}">
-                <a16:creationId xmlns:a16="http://schemas.microsoft.com/office/drawing/2014/main" id="{7CBD23C3-894B-4F88-A78B-CD2A5AAD9414}"/>
+                <a16:creationId xmlns:a16="http://schemas.microsoft.com/office/drawing/2014/main" id="{74989D1B-14CB-4629-AAAC-2ABB93231832}"/>
               </a:ext>
             </a:extLst>
           </p:cNvPr>
@@ -13363,7 +13371,7 @@
           <p:cNvPr id="7" name="">
             <a:extLst xmlns:a="http://schemas.openxmlformats.org/drawingml/2006/main">
               <a:ext uri="{FF2B5EF4-FFF2-40B4-BE49-F238E27FC236}">
-                <a16:creationId xmlns:a16="http://schemas.microsoft.com/office/drawing/2014/main" id="{DD06928D-0532-43BC-B21C-153C98DACD79}"/>
+                <a16:creationId xmlns:a16="http://schemas.microsoft.com/office/drawing/2014/main" id="{5B67F43E-1674-48BD-804B-BE6E1BBA4EA1}"/>
               </a:ext>
             </a:extLst>
           </p:cNvPr>
@@ -13395,7 +13403,7 @@
           <p:cNvPr id="8" name="">
             <a:extLst xmlns:a="http://schemas.openxmlformats.org/drawingml/2006/main">
               <a:ext uri="{FF2B5EF4-FFF2-40B4-BE49-F238E27FC236}">
-                <a16:creationId xmlns:a16="http://schemas.microsoft.com/office/drawing/2014/main" id="{E4475FFF-9C9E-44D2-B0B3-3B9C97CF8FE7}"/>
+                <a16:creationId xmlns:a16="http://schemas.microsoft.com/office/drawing/2014/main" id="{D6EB9232-9C6A-4940-AE80-62BAAA38452D}"/>
               </a:ext>
             </a:extLst>
           </p:cNvPr>
@@ -13452,7 +13460,7 @@
           <p:cNvPr id="9" name="">
             <a:extLst xmlns:a="http://schemas.openxmlformats.org/drawingml/2006/main">
               <a:ext uri="{FF2B5EF4-FFF2-40B4-BE49-F238E27FC236}">
-                <a16:creationId xmlns:a16="http://schemas.microsoft.com/office/drawing/2014/main" id="{E7F41C30-A48A-4852-9FD6-F8C3174758B1}"/>
+                <a16:creationId xmlns:a16="http://schemas.microsoft.com/office/drawing/2014/main" id="{2A48072C-E5C4-4ACA-ABB0-079816C54E13}"/>
               </a:ext>
             </a:extLst>
           </p:cNvPr>
@@ -13509,7 +13517,7 @@
           <p:cNvPr id="10" name="">
             <a:extLst xmlns:a="http://schemas.openxmlformats.org/drawingml/2006/main">
               <a:ext uri="{FF2B5EF4-FFF2-40B4-BE49-F238E27FC236}">
-                <a16:creationId xmlns:a16="http://schemas.microsoft.com/office/drawing/2014/main" id="{01A0AF80-DEE0-4D83-A817-B074238E199B}"/>
+                <a16:creationId xmlns:a16="http://schemas.microsoft.com/office/drawing/2014/main" id="{2C3D2B76-1385-4F1D-9282-1C5A234F03B7}"/>
               </a:ext>
             </a:extLst>
           </p:cNvPr>
@@ -13543,7 +13551,7 @@
           <p:cNvPr id="11" name="">
             <a:extLst xmlns:a="http://schemas.openxmlformats.org/drawingml/2006/main">
               <a:ext uri="{FF2B5EF4-FFF2-40B4-BE49-F238E27FC236}">
-                <a16:creationId xmlns:a16="http://schemas.microsoft.com/office/drawing/2014/main" id="{F1B8FE23-8678-4424-92A4-6DA41A30B4DD}"/>
+                <a16:creationId xmlns:a16="http://schemas.microsoft.com/office/drawing/2014/main" id="{2B689A58-CA0E-408A-8F58-EC11944D7723}"/>
               </a:ext>
             </a:extLst>
           </p:cNvPr>
@@ -13575,7 +13583,7 @@
           <p:cNvPr id="12" name="">
             <a:extLst xmlns:a="http://schemas.openxmlformats.org/drawingml/2006/main">
               <a:ext uri="{FF2B5EF4-FFF2-40B4-BE49-F238E27FC236}">
-                <a16:creationId xmlns:a16="http://schemas.microsoft.com/office/drawing/2014/main" id="{8BA18F3A-E702-41BF-ACF8-F266F39D1EDE}"/>
+                <a16:creationId xmlns:a16="http://schemas.microsoft.com/office/drawing/2014/main" id="{DE70B2D0-BE04-4B0B-9962-2D8858FB8239}"/>
               </a:ext>
             </a:extLst>
           </p:cNvPr>
@@ -13632,7 +13640,7 @@
           <p:cNvPr id="13" name="">
             <a:extLst xmlns:a="http://schemas.openxmlformats.org/drawingml/2006/main">
               <a:ext uri="{FF2B5EF4-FFF2-40B4-BE49-F238E27FC236}">
-                <a16:creationId xmlns:a16="http://schemas.microsoft.com/office/drawing/2014/main" id="{1DD62CE1-2DB5-4B5C-B70C-627A30A7973F}"/>
+                <a16:creationId xmlns:a16="http://schemas.microsoft.com/office/drawing/2014/main" id="{79B62B07-760E-4DD8-BC10-F137191B0B34}"/>
               </a:ext>
             </a:extLst>
           </p:cNvPr>
@@ -13689,7 +13697,7 @@
           <p:cNvPr id="14" name="">
             <a:extLst xmlns:a="http://schemas.openxmlformats.org/drawingml/2006/main">
               <a:ext uri="{FF2B5EF4-FFF2-40B4-BE49-F238E27FC236}">
-                <a16:creationId xmlns:a16="http://schemas.microsoft.com/office/drawing/2014/main" id="{8BDDBEC4-05A1-4E0B-AEA5-E47CB8044510}"/>
+                <a16:creationId xmlns:a16="http://schemas.microsoft.com/office/drawing/2014/main" id="{3EF39E2C-CFAB-48B8-93C8-E53706F24A09}"/>
               </a:ext>
             </a:extLst>
           </p:cNvPr>
@@ -13723,7 +13731,7 @@
           <p:cNvPr id="15" name="">
             <a:extLst xmlns:a="http://schemas.openxmlformats.org/drawingml/2006/main">
               <a:ext uri="{FF2B5EF4-FFF2-40B4-BE49-F238E27FC236}">
-                <a16:creationId xmlns:a16="http://schemas.microsoft.com/office/drawing/2014/main" id="{68EC2B55-E8F8-458A-ABA8-8A6691B9236C}"/>
+                <a16:creationId xmlns:a16="http://schemas.microsoft.com/office/drawing/2014/main" id="{A27FCE27-41E3-4A25-88D8-FAF26D80CBD8}"/>
               </a:ext>
             </a:extLst>
           </p:cNvPr>
@@ -13755,7 +13763,7 @@
           <p:cNvPr id="16" name="">
             <a:extLst xmlns:a="http://schemas.openxmlformats.org/drawingml/2006/main">
               <a:ext uri="{FF2B5EF4-FFF2-40B4-BE49-F238E27FC236}">
-                <a16:creationId xmlns:a16="http://schemas.microsoft.com/office/drawing/2014/main" id="{F7DBB7CF-04B6-480A-9CA9-BE49B41C824D}"/>
+                <a16:creationId xmlns:a16="http://schemas.microsoft.com/office/drawing/2014/main" id="{EFC47908-0AF3-46E2-BE1F-45CD2ADF5B61}"/>
               </a:ext>
             </a:extLst>
           </p:cNvPr>
@@ -13812,7 +13820,7 @@
           <p:cNvPr id="17" name="">
             <a:extLst xmlns:a="http://schemas.openxmlformats.org/drawingml/2006/main">
               <a:ext uri="{FF2B5EF4-FFF2-40B4-BE49-F238E27FC236}">
-                <a16:creationId xmlns:a16="http://schemas.microsoft.com/office/drawing/2014/main" id="{1E8E7888-0BD0-4CC6-A632-141845DEDC85}"/>
+                <a16:creationId xmlns:a16="http://schemas.microsoft.com/office/drawing/2014/main" id="{20C90469-863B-4308-9EF2-CAE27784CE05}"/>
               </a:ext>
             </a:extLst>
           </p:cNvPr>
@@ -13869,7 +13877,7 @@
           <p:cNvPr id="18" name="">
             <a:extLst xmlns:a="http://schemas.openxmlformats.org/drawingml/2006/main">
               <a:ext uri="{FF2B5EF4-FFF2-40B4-BE49-F238E27FC236}">
-                <a16:creationId xmlns:a16="http://schemas.microsoft.com/office/drawing/2014/main" id="{512469C7-7B80-40AB-BC7F-A5365020DF20}"/>
+                <a16:creationId xmlns:a16="http://schemas.microsoft.com/office/drawing/2014/main" id="{F986AD03-4D25-4E93-B725-B345326FC287}"/>
               </a:ext>
             </a:extLst>
           </p:cNvPr>
@@ -13903,7 +13911,7 @@
           <p:cNvPr id="19" name="">
             <a:extLst xmlns:a="http://schemas.openxmlformats.org/drawingml/2006/main">
               <a:ext uri="{FF2B5EF4-FFF2-40B4-BE49-F238E27FC236}">
-                <a16:creationId xmlns:a16="http://schemas.microsoft.com/office/drawing/2014/main" id="{8E690CDC-615F-47EB-9F62-956EFC3C8EFE}"/>
+                <a16:creationId xmlns:a16="http://schemas.microsoft.com/office/drawing/2014/main" id="{6A2A6AAB-12B6-409B-BB5F-2609A62C6B8D}"/>
               </a:ext>
             </a:extLst>
           </p:cNvPr>
@@ -13935,7 +13943,7 @@
           <p:cNvPr id="20" name="">
             <a:extLst xmlns:a="http://schemas.openxmlformats.org/drawingml/2006/main">
               <a:ext uri="{FF2B5EF4-FFF2-40B4-BE49-F238E27FC236}">
-                <a16:creationId xmlns:a16="http://schemas.microsoft.com/office/drawing/2014/main" id="{CCF8F312-A4C5-49D0-AA41-9DED20B5F1F7}"/>
+                <a16:creationId xmlns:a16="http://schemas.microsoft.com/office/drawing/2014/main" id="{7C837DAE-E97C-4768-BFDA-EDF182DC7A18}"/>
               </a:ext>
             </a:extLst>
           </p:cNvPr>
@@ -13992,7 +14000,7 @@
           <p:cNvPr id="21" name="">
             <a:extLst xmlns:a="http://schemas.openxmlformats.org/drawingml/2006/main">
               <a:ext uri="{FF2B5EF4-FFF2-40B4-BE49-F238E27FC236}">
-                <a16:creationId xmlns:a16="http://schemas.microsoft.com/office/drawing/2014/main" id="{934427C5-B32A-42CD-87C1-CA3DD1782811}"/>
+                <a16:creationId xmlns:a16="http://schemas.microsoft.com/office/drawing/2014/main" id="{FC5524E9-52EC-4207-B08B-BE924D212EBF}"/>
               </a:ext>
             </a:extLst>
           </p:cNvPr>
@@ -14047,7 +14055,7 @@
     </p:spTree>
     <p:extLst>
       <p:ext uri="{BB962C8B-B14F-4D97-AF65-F5344CB8AC3E}">
-        <p14:creationId xmlns:p14="http://schemas.microsoft.com/office/powerpoint/2010/main" val="1829800302"/>
+        <p14:creationId xmlns:p14="http://schemas.microsoft.com/office/powerpoint/2010/main" val="2017340397"/>
       </p:ext>
     </p:extLst>
   </p:cSld>
